--- a/Documents/2026_07_02_ペットボトル缶サットを作ろう.pptx
+++ b/Documents/2026_07_02_ペットボトル缶サットを作ろう.pptx
@@ -10,15 +10,15 @@
   <p:sldIdLst>
     <p:sldId id="257" r:id="rId2"/>
     <p:sldId id="356" r:id="rId3"/>
-    <p:sldId id="357" r:id="rId4"/>
-    <p:sldId id="402" r:id="rId5"/>
-    <p:sldId id="358" r:id="rId6"/>
-    <p:sldId id="403" r:id="rId7"/>
-    <p:sldId id="404" r:id="rId8"/>
-    <p:sldId id="406" r:id="rId9"/>
-    <p:sldId id="407" r:id="rId10"/>
-    <p:sldId id="405" r:id="rId11"/>
-    <p:sldId id="359" r:id="rId12"/>
+    <p:sldId id="408" r:id="rId4"/>
+    <p:sldId id="357" r:id="rId5"/>
+    <p:sldId id="402" r:id="rId6"/>
+    <p:sldId id="358" r:id="rId7"/>
+    <p:sldId id="409" r:id="rId8"/>
+    <p:sldId id="410" r:id="rId9"/>
+    <p:sldId id="403" r:id="rId10"/>
+    <p:sldId id="404" r:id="rId11"/>
+    <p:sldId id="406" r:id="rId12"/>
     <p:sldId id="360" r:id="rId13"/>
   </p:sldIdLst>
   <p:sldSz cx="9144000" cy="6858000" type="screen4x3"/>
@@ -219,7 +219,7 @@
           <a:p>
             <a:fld id="{A0617300-614F-475F-883E-297FBDAC493B}" type="datetimeFigureOut">
               <a:rPr kumimoji="1" lang="ja-JP" altLang="en-US" smtClean="0"/>
-              <a:t>2026/7/2</a:t>
+              <a:t>2026/7/3</a:t>
             </a:fld>
             <a:endParaRPr kumimoji="1" lang="ja-JP" altLang="en-US"/>
           </a:p>
@@ -638,7 +638,13 @@
   <p:cSld>
     <p:spTree>
       <p:nvGrpSpPr>
-        <p:cNvPr id="1" name=""/>
+        <p:cNvPr id="1" name="">
+          <a:extLst>
+            <a:ext uri="{FF2B5EF4-FFF2-40B4-BE49-F238E27FC236}">
+              <a16:creationId xmlns:a16="http://schemas.microsoft.com/office/drawing/2014/main" id="{7FAC1ADE-0D14-34F1-EF98-C4ED807AED2A}"/>
+            </a:ext>
+          </a:extLst>
+        </p:cNvPr>
         <p:cNvGrpSpPr/>
         <p:nvPr/>
       </p:nvGrpSpPr>
@@ -652,7 +658,13 @@
       </p:grpSpPr>
       <p:sp>
         <p:nvSpPr>
-          <p:cNvPr id="2" name="スライド イメージ プレースホルダー 1"/>
+          <p:cNvPr id="2" name="スライド イメージ プレースホルダー 1">
+            <a:extLst>
+              <a:ext uri="{FF2B5EF4-FFF2-40B4-BE49-F238E27FC236}">
+                <a16:creationId xmlns:a16="http://schemas.microsoft.com/office/drawing/2014/main" id="{32A08C4B-A107-3A45-50E7-6096350E22AF}"/>
+              </a:ext>
+            </a:extLst>
+          </p:cNvPr>
           <p:cNvSpPr>
             <a:spLocks noGrp="1" noRot="1" noChangeAspect="1"/>
           </p:cNvSpPr>
@@ -664,7 +676,13 @@
       </p:sp>
       <p:sp>
         <p:nvSpPr>
-          <p:cNvPr id="3" name="ノート プレースホルダー 2"/>
+          <p:cNvPr id="3" name="ノート プレースホルダー 2">
+            <a:extLst>
+              <a:ext uri="{FF2B5EF4-FFF2-40B4-BE49-F238E27FC236}">
+                <a16:creationId xmlns:a16="http://schemas.microsoft.com/office/drawing/2014/main" id="{546E2206-BB7A-4E73-7CC5-CE50E26321FD}"/>
+              </a:ext>
+            </a:extLst>
+          </p:cNvPr>
           <p:cNvSpPr>
             <a:spLocks noGrp="1"/>
           </p:cNvSpPr>
@@ -714,7 +732,13 @@
       </p:sp>
       <p:sp>
         <p:nvSpPr>
-          <p:cNvPr id="4" name="スライド番号プレースホルダー 3"/>
+          <p:cNvPr id="4" name="スライド番号プレースホルダー 3">
+            <a:extLst>
+              <a:ext uri="{FF2B5EF4-FFF2-40B4-BE49-F238E27FC236}">
+                <a16:creationId xmlns:a16="http://schemas.microsoft.com/office/drawing/2014/main" id="{B0909AF8-DCD9-5757-06F4-3F1669EA843B}"/>
+              </a:ext>
+            </a:extLst>
+          </p:cNvPr>
           <p:cNvSpPr>
             <a:spLocks noGrp="1"/>
           </p:cNvSpPr>
@@ -738,7 +762,7 @@
     </p:spTree>
     <p:extLst>
       <p:ext uri="{BB962C8B-B14F-4D97-AF65-F5344CB8AC3E}">
-        <p14:creationId xmlns:p14="http://schemas.microsoft.com/office/powerpoint/2010/main" val="3677783373"/>
+        <p14:creationId xmlns:p14="http://schemas.microsoft.com/office/powerpoint/2010/main" val="3346830851"/>
       </p:ext>
     </p:extLst>
   </p:cSld>
@@ -868,6 +892,145 @@
   <p:cSld>
     <p:spTree>
       <p:nvGrpSpPr>
+        <p:cNvPr id="1" name="">
+          <a:extLst>
+            <a:ext uri="{FF2B5EF4-FFF2-40B4-BE49-F238E27FC236}">
+              <a16:creationId xmlns:a16="http://schemas.microsoft.com/office/drawing/2014/main" id="{8BFCD678-882B-839C-07DE-BBB3C2577E9C}"/>
+            </a:ext>
+          </a:extLst>
+        </p:cNvPr>
+        <p:cNvGrpSpPr/>
+        <p:nvPr/>
+      </p:nvGrpSpPr>
+      <p:grpSpPr>
+        <a:xfrm>
+          <a:off x="0" y="0"/>
+          <a:ext cx="0" cy="0"/>
+          <a:chOff x="0" y="0"/>
+          <a:chExt cx="0" cy="0"/>
+        </a:xfrm>
+      </p:grpSpPr>
+      <p:sp>
+        <p:nvSpPr>
+          <p:cNvPr id="2" name="スライド イメージ プレースホルダー 1">
+            <a:extLst>
+              <a:ext uri="{FF2B5EF4-FFF2-40B4-BE49-F238E27FC236}">
+                <a16:creationId xmlns:a16="http://schemas.microsoft.com/office/drawing/2014/main" id="{3188DFE8-42FE-EA18-9A7D-717C996C20DE}"/>
+              </a:ext>
+            </a:extLst>
+          </p:cNvPr>
+          <p:cNvSpPr>
+            <a:spLocks noGrp="1" noRot="1" noChangeAspect="1"/>
+          </p:cNvSpPr>
+          <p:nvPr>
+            <p:ph type="sldImg"/>
+          </p:nvPr>
+        </p:nvSpPr>
+        <p:spPr/>
+      </p:sp>
+      <p:sp>
+        <p:nvSpPr>
+          <p:cNvPr id="3" name="ノート プレースホルダー 2">
+            <a:extLst>
+              <a:ext uri="{FF2B5EF4-FFF2-40B4-BE49-F238E27FC236}">
+                <a16:creationId xmlns:a16="http://schemas.microsoft.com/office/drawing/2014/main" id="{CC43EEE3-FD8D-C950-294E-2E99D6F8BA9C}"/>
+              </a:ext>
+            </a:extLst>
+          </p:cNvPr>
+          <p:cNvSpPr>
+            <a:spLocks noGrp="1"/>
+          </p:cNvSpPr>
+          <p:nvPr>
+            <p:ph type="body" idx="1"/>
+          </p:nvPr>
+        </p:nvSpPr>
+        <p:spPr/>
+        <p:txBody>
+          <a:bodyPr/>
+          <a:lstStyle/>
+          <a:p>
+            <a:r>
+              <a:rPr kumimoji="1" lang="ja-JP" altLang="en-US" dirty="0"/>
+              <a:t>ここで、突然ですが、「缶サット甲子園」について説明します。</a:t>
+            </a:r>
+          </a:p>
+          <a:p>
+            <a:r>
+              <a:rPr kumimoji="1" lang="ja-JP" altLang="en-US" dirty="0"/>
+              <a:t>缶サット甲子園というのは、高校生たちが、模擬人工衛星</a:t>
+            </a:r>
+            <a:r>
+              <a:rPr kumimoji="1" lang="en-US" altLang="ja-JP" dirty="0" err="1"/>
+              <a:t>CanSat</a:t>
+            </a:r>
+            <a:r>
+              <a:rPr kumimoji="1" lang="ja-JP" altLang="en-US" dirty="0"/>
+              <a:t>を作って、ロケットで打ち上げ、地上に落下してくるまでに、缶サットに課したミッションが如何に斬新か、クールかを争う競技です。</a:t>
+            </a:r>
+          </a:p>
+          <a:p>
+            <a:r>
+              <a:rPr kumimoji="1" lang="ja-JP" altLang="en-US" dirty="0"/>
+              <a:t>この大会に参加する高校生たちが小さい</a:t>
+            </a:r>
+            <a:r>
+              <a:rPr kumimoji="1" lang="en-US" altLang="ja-JP" dirty="0" err="1"/>
+              <a:t>Wakayama.rb</a:t>
+            </a:r>
+            <a:r>
+              <a:rPr kumimoji="1" lang="ja-JP" altLang="en-US" dirty="0"/>
+              <a:t>ボードを採用してくれているので、それも一緒に紹介したいと思います。</a:t>
+            </a:r>
+          </a:p>
+        </p:txBody>
+      </p:sp>
+      <p:sp>
+        <p:nvSpPr>
+          <p:cNvPr id="4" name="スライド番号プレースホルダー 3">
+            <a:extLst>
+              <a:ext uri="{FF2B5EF4-FFF2-40B4-BE49-F238E27FC236}">
+                <a16:creationId xmlns:a16="http://schemas.microsoft.com/office/drawing/2014/main" id="{05DB7CBF-673A-9736-419A-C27414D3A912}"/>
+              </a:ext>
+            </a:extLst>
+          </p:cNvPr>
+          <p:cNvSpPr>
+            <a:spLocks noGrp="1"/>
+          </p:cNvSpPr>
+          <p:nvPr>
+            <p:ph type="sldNum" sz="quarter" idx="5"/>
+          </p:nvPr>
+        </p:nvSpPr>
+        <p:spPr/>
+        <p:txBody>
+          <a:bodyPr/>
+          <a:lstStyle/>
+          <a:p>
+            <a:fld id="{99F30D02-CB94-4A91-AF86-16FC66827DC2}" type="slidenum">
+              <a:rPr kumimoji="1" lang="ja-JP" altLang="en-US" smtClean="0"/>
+              <a:t>3</a:t>
+            </a:fld>
+            <a:endParaRPr kumimoji="1" lang="ja-JP" altLang="en-US"/>
+          </a:p>
+        </p:txBody>
+      </p:sp>
+    </p:spTree>
+    <p:extLst>
+      <p:ext uri="{BB962C8B-B14F-4D97-AF65-F5344CB8AC3E}">
+        <p14:creationId xmlns:p14="http://schemas.microsoft.com/office/powerpoint/2010/main" val="3133860047"/>
+      </p:ext>
+    </p:extLst>
+  </p:cSld>
+  <p:clrMapOvr>
+    <a:masterClrMapping/>
+  </p:clrMapOvr>
+</p:notes>
+</file>
+
+<file path=ppt/notesSlides/notesSlide3.xml><?xml version="1.0" encoding="utf-8"?>
+<p:notes xmlns:a="http://schemas.openxmlformats.org/drawingml/2006/main" xmlns:r="http://schemas.openxmlformats.org/officeDocument/2006/relationships" xmlns:p="http://schemas.openxmlformats.org/presentationml/2006/main">
+  <p:cSld>
+    <p:spTree>
+      <p:nvGrpSpPr>
         <p:cNvPr id="1" name=""/>
         <p:cNvGrpSpPr/>
         <p:nvPr/>
@@ -959,7 +1122,7 @@
           <a:p>
             <a:fld id="{99F30D02-CB94-4A91-AF86-16FC66827DC2}" type="slidenum">
               <a:rPr kumimoji="1" lang="ja-JP" altLang="en-US" smtClean="0"/>
-              <a:t>3</a:t>
+              <a:t>4</a:t>
             </a:fld>
             <a:endParaRPr kumimoji="1" lang="ja-JP" altLang="en-US"/>
           </a:p>
@@ -978,7 +1141,7 @@
 </p:notes>
 </file>
 
-<file path=ppt/notesSlides/notesSlide3.xml><?xml version="1.0" encoding="utf-8"?>
+<file path=ppt/notesSlides/notesSlide4.xml><?xml version="1.0" encoding="utf-8"?>
 <p:notes xmlns:a="http://schemas.openxmlformats.org/drawingml/2006/main" xmlns:r="http://schemas.openxmlformats.org/officeDocument/2006/relationships" xmlns:p="http://schemas.openxmlformats.org/presentationml/2006/main">
   <p:cSld>
     <p:spTree>
@@ -1098,7 +1261,7 @@
           <a:p>
             <a:fld id="{99F30D02-CB94-4A91-AF86-16FC66827DC2}" type="slidenum">
               <a:rPr kumimoji="1" lang="ja-JP" altLang="en-US" smtClean="0"/>
-              <a:t>4</a:t>
+              <a:t>5</a:t>
             </a:fld>
             <a:endParaRPr kumimoji="1" lang="ja-JP" altLang="en-US"/>
           </a:p>
@@ -1117,7 +1280,7 @@
 </p:notes>
 </file>
 
-<file path=ppt/notesSlides/notesSlide4.xml><?xml version="1.0" encoding="utf-8"?>
+<file path=ppt/notesSlides/notesSlide5.xml><?xml version="1.0" encoding="utf-8"?>
 <p:notes xmlns:a="http://schemas.openxmlformats.org/drawingml/2006/main" xmlns:r="http://schemas.openxmlformats.org/officeDocument/2006/relationships" xmlns:p="http://schemas.openxmlformats.org/presentationml/2006/main">
   <p:cSld>
     <p:spTree>
@@ -1213,7 +1376,7 @@
           <a:p>
             <a:fld id="{99F30D02-CB94-4A91-AF86-16FC66827DC2}" type="slidenum">
               <a:rPr kumimoji="1" lang="ja-JP" altLang="en-US" smtClean="0"/>
-              <a:t>5</a:t>
+              <a:t>6</a:t>
             </a:fld>
             <a:endParaRPr kumimoji="1" lang="ja-JP" altLang="en-US"/>
           </a:p>
@@ -1232,7 +1395,285 @@
 </p:notes>
 </file>
 
-<file path=ppt/notesSlides/notesSlide5.xml><?xml version="1.0" encoding="utf-8"?>
+<file path=ppt/notesSlides/notesSlide6.xml><?xml version="1.0" encoding="utf-8"?>
+<p:notes xmlns:a="http://schemas.openxmlformats.org/drawingml/2006/main" xmlns:r="http://schemas.openxmlformats.org/officeDocument/2006/relationships" xmlns:p="http://schemas.openxmlformats.org/presentationml/2006/main">
+  <p:cSld>
+    <p:spTree>
+      <p:nvGrpSpPr>
+        <p:cNvPr id="1" name="">
+          <a:extLst>
+            <a:ext uri="{FF2B5EF4-FFF2-40B4-BE49-F238E27FC236}">
+              <a16:creationId xmlns:a16="http://schemas.microsoft.com/office/drawing/2014/main" id="{C2D59BEE-E101-EEBD-4F8A-DBDD135EDE2C}"/>
+            </a:ext>
+          </a:extLst>
+        </p:cNvPr>
+        <p:cNvGrpSpPr/>
+        <p:nvPr/>
+      </p:nvGrpSpPr>
+      <p:grpSpPr>
+        <a:xfrm>
+          <a:off x="0" y="0"/>
+          <a:ext cx="0" cy="0"/>
+          <a:chOff x="0" y="0"/>
+          <a:chExt cx="0" cy="0"/>
+        </a:xfrm>
+      </p:grpSpPr>
+      <p:sp>
+        <p:nvSpPr>
+          <p:cNvPr id="2" name="スライド イメージ プレースホルダー 1">
+            <a:extLst>
+              <a:ext uri="{FF2B5EF4-FFF2-40B4-BE49-F238E27FC236}">
+                <a16:creationId xmlns:a16="http://schemas.microsoft.com/office/drawing/2014/main" id="{CD034D98-2541-ED6E-7928-763C40A4F3C3}"/>
+              </a:ext>
+            </a:extLst>
+          </p:cNvPr>
+          <p:cNvSpPr>
+            <a:spLocks noGrp="1" noRot="1" noChangeAspect="1"/>
+          </p:cNvSpPr>
+          <p:nvPr>
+            <p:ph type="sldImg"/>
+          </p:nvPr>
+        </p:nvSpPr>
+        <p:spPr/>
+      </p:sp>
+      <p:sp>
+        <p:nvSpPr>
+          <p:cNvPr id="3" name="ノート プレースホルダー 2">
+            <a:extLst>
+              <a:ext uri="{FF2B5EF4-FFF2-40B4-BE49-F238E27FC236}">
+                <a16:creationId xmlns:a16="http://schemas.microsoft.com/office/drawing/2014/main" id="{A0411160-E12B-AC8A-F931-324FC7812202}"/>
+              </a:ext>
+            </a:extLst>
+          </p:cNvPr>
+          <p:cNvSpPr>
+            <a:spLocks noGrp="1"/>
+          </p:cNvSpPr>
+          <p:nvPr>
+            <p:ph type="body" idx="1"/>
+          </p:nvPr>
+        </p:nvSpPr>
+        <p:spPr/>
+        <p:txBody>
+          <a:bodyPr/>
+          <a:lstStyle/>
+          <a:p>
+            <a:r>
+              <a:rPr kumimoji="1" lang="ja-JP" altLang="en-US" dirty="0"/>
+              <a:t>ここで、突然ですが、「缶サット甲子園」について説明します。</a:t>
+            </a:r>
+          </a:p>
+          <a:p>
+            <a:r>
+              <a:rPr kumimoji="1" lang="ja-JP" altLang="en-US" dirty="0"/>
+              <a:t>缶サット甲子園というのは、高校生たちが、模擬人工衛星</a:t>
+            </a:r>
+            <a:r>
+              <a:rPr kumimoji="1" lang="en-US" altLang="ja-JP" dirty="0" err="1"/>
+              <a:t>CanSat</a:t>
+            </a:r>
+            <a:r>
+              <a:rPr kumimoji="1" lang="ja-JP" altLang="en-US" dirty="0"/>
+              <a:t>を作って、ロケットで打ち上げ、地上に落下してくるまでに、缶サットに課したミッションが如何に斬新か、クールかを争う競技です。</a:t>
+            </a:r>
+          </a:p>
+          <a:p>
+            <a:r>
+              <a:rPr kumimoji="1" lang="ja-JP" altLang="en-US" dirty="0"/>
+              <a:t>この大会に参加する高校生たちが小さい</a:t>
+            </a:r>
+            <a:r>
+              <a:rPr kumimoji="1" lang="en-US" altLang="ja-JP" dirty="0" err="1"/>
+              <a:t>Wakayama.rb</a:t>
+            </a:r>
+            <a:r>
+              <a:rPr kumimoji="1" lang="ja-JP" altLang="en-US" dirty="0"/>
+              <a:t>ボードを採用してくれているので、それも一緒に紹介したいと思います。</a:t>
+            </a:r>
+          </a:p>
+        </p:txBody>
+      </p:sp>
+      <p:sp>
+        <p:nvSpPr>
+          <p:cNvPr id="4" name="スライド番号プレースホルダー 3">
+            <a:extLst>
+              <a:ext uri="{FF2B5EF4-FFF2-40B4-BE49-F238E27FC236}">
+                <a16:creationId xmlns:a16="http://schemas.microsoft.com/office/drawing/2014/main" id="{37621CC4-A384-FD4D-697E-5FF666FAFCCF}"/>
+              </a:ext>
+            </a:extLst>
+          </p:cNvPr>
+          <p:cNvSpPr>
+            <a:spLocks noGrp="1"/>
+          </p:cNvSpPr>
+          <p:nvPr>
+            <p:ph type="sldNum" sz="quarter" idx="5"/>
+          </p:nvPr>
+        </p:nvSpPr>
+        <p:spPr/>
+        <p:txBody>
+          <a:bodyPr/>
+          <a:lstStyle/>
+          <a:p>
+            <a:fld id="{99F30D02-CB94-4A91-AF86-16FC66827DC2}" type="slidenum">
+              <a:rPr kumimoji="1" lang="ja-JP" altLang="en-US" smtClean="0"/>
+              <a:t>7</a:t>
+            </a:fld>
+            <a:endParaRPr kumimoji="1" lang="ja-JP" altLang="en-US"/>
+          </a:p>
+        </p:txBody>
+      </p:sp>
+    </p:spTree>
+    <p:extLst>
+      <p:ext uri="{BB962C8B-B14F-4D97-AF65-F5344CB8AC3E}">
+        <p14:creationId xmlns:p14="http://schemas.microsoft.com/office/powerpoint/2010/main" val="548831061"/>
+      </p:ext>
+    </p:extLst>
+  </p:cSld>
+  <p:clrMapOvr>
+    <a:masterClrMapping/>
+  </p:clrMapOvr>
+</p:notes>
+</file>
+
+<file path=ppt/notesSlides/notesSlide7.xml><?xml version="1.0" encoding="utf-8"?>
+<p:notes xmlns:a="http://schemas.openxmlformats.org/drawingml/2006/main" xmlns:r="http://schemas.openxmlformats.org/officeDocument/2006/relationships" xmlns:p="http://schemas.openxmlformats.org/presentationml/2006/main">
+  <p:cSld>
+    <p:spTree>
+      <p:nvGrpSpPr>
+        <p:cNvPr id="1" name="">
+          <a:extLst>
+            <a:ext uri="{FF2B5EF4-FFF2-40B4-BE49-F238E27FC236}">
+              <a16:creationId xmlns:a16="http://schemas.microsoft.com/office/drawing/2014/main" id="{31D3A1CE-4EF7-4C77-A987-CFB302C4FC4E}"/>
+            </a:ext>
+          </a:extLst>
+        </p:cNvPr>
+        <p:cNvGrpSpPr/>
+        <p:nvPr/>
+      </p:nvGrpSpPr>
+      <p:grpSpPr>
+        <a:xfrm>
+          <a:off x="0" y="0"/>
+          <a:ext cx="0" cy="0"/>
+          <a:chOff x="0" y="0"/>
+          <a:chExt cx="0" cy="0"/>
+        </a:xfrm>
+      </p:grpSpPr>
+      <p:sp>
+        <p:nvSpPr>
+          <p:cNvPr id="2" name="スライド イメージ プレースホルダー 1">
+            <a:extLst>
+              <a:ext uri="{FF2B5EF4-FFF2-40B4-BE49-F238E27FC236}">
+                <a16:creationId xmlns:a16="http://schemas.microsoft.com/office/drawing/2014/main" id="{83F3997E-9D26-8AC5-183D-EDFA939F8189}"/>
+              </a:ext>
+            </a:extLst>
+          </p:cNvPr>
+          <p:cNvSpPr>
+            <a:spLocks noGrp="1" noRot="1" noChangeAspect="1"/>
+          </p:cNvSpPr>
+          <p:nvPr>
+            <p:ph type="sldImg"/>
+          </p:nvPr>
+        </p:nvSpPr>
+        <p:spPr/>
+      </p:sp>
+      <p:sp>
+        <p:nvSpPr>
+          <p:cNvPr id="3" name="ノート プレースホルダー 2">
+            <a:extLst>
+              <a:ext uri="{FF2B5EF4-FFF2-40B4-BE49-F238E27FC236}">
+                <a16:creationId xmlns:a16="http://schemas.microsoft.com/office/drawing/2014/main" id="{0A0FA415-1909-6C5C-3B4D-43759668F5FF}"/>
+              </a:ext>
+            </a:extLst>
+          </p:cNvPr>
+          <p:cNvSpPr>
+            <a:spLocks noGrp="1"/>
+          </p:cNvSpPr>
+          <p:nvPr>
+            <p:ph type="body" idx="1"/>
+          </p:nvPr>
+        </p:nvSpPr>
+        <p:spPr/>
+        <p:txBody>
+          <a:bodyPr/>
+          <a:lstStyle/>
+          <a:p>
+            <a:r>
+              <a:rPr kumimoji="1" lang="ja-JP" altLang="en-US" dirty="0"/>
+              <a:t>ここで、突然ですが、「缶サット甲子園」について説明します。</a:t>
+            </a:r>
+          </a:p>
+          <a:p>
+            <a:r>
+              <a:rPr kumimoji="1" lang="ja-JP" altLang="en-US" dirty="0"/>
+              <a:t>缶サット甲子園というのは、高校生たちが、模擬人工衛星</a:t>
+            </a:r>
+            <a:r>
+              <a:rPr kumimoji="1" lang="en-US" altLang="ja-JP" dirty="0" err="1"/>
+              <a:t>CanSat</a:t>
+            </a:r>
+            <a:r>
+              <a:rPr kumimoji="1" lang="ja-JP" altLang="en-US" dirty="0"/>
+              <a:t>を作って、ロケットで打ち上げ、地上に落下してくるまでに、缶サットに課したミッションが如何に斬新か、クールかを争う競技です。</a:t>
+            </a:r>
+          </a:p>
+          <a:p>
+            <a:r>
+              <a:rPr kumimoji="1" lang="ja-JP" altLang="en-US" dirty="0"/>
+              <a:t>この大会に参加する高校生たちが小さい</a:t>
+            </a:r>
+            <a:r>
+              <a:rPr kumimoji="1" lang="en-US" altLang="ja-JP" dirty="0" err="1"/>
+              <a:t>Wakayama.rb</a:t>
+            </a:r>
+            <a:r>
+              <a:rPr kumimoji="1" lang="ja-JP" altLang="en-US" dirty="0"/>
+              <a:t>ボードを採用してくれているので、それも一緒に紹介したいと思います。</a:t>
+            </a:r>
+          </a:p>
+        </p:txBody>
+      </p:sp>
+      <p:sp>
+        <p:nvSpPr>
+          <p:cNvPr id="4" name="スライド番号プレースホルダー 3">
+            <a:extLst>
+              <a:ext uri="{FF2B5EF4-FFF2-40B4-BE49-F238E27FC236}">
+                <a16:creationId xmlns:a16="http://schemas.microsoft.com/office/drawing/2014/main" id="{BDC266EF-88C2-D215-B81A-4F119DF85B23}"/>
+              </a:ext>
+            </a:extLst>
+          </p:cNvPr>
+          <p:cNvSpPr>
+            <a:spLocks noGrp="1"/>
+          </p:cNvSpPr>
+          <p:nvPr>
+            <p:ph type="sldNum" sz="quarter" idx="5"/>
+          </p:nvPr>
+        </p:nvSpPr>
+        <p:spPr/>
+        <p:txBody>
+          <a:bodyPr/>
+          <a:lstStyle/>
+          <a:p>
+            <a:fld id="{99F30D02-CB94-4A91-AF86-16FC66827DC2}" type="slidenum">
+              <a:rPr kumimoji="1" lang="ja-JP" altLang="en-US" smtClean="0"/>
+              <a:t>8</a:t>
+            </a:fld>
+            <a:endParaRPr kumimoji="1" lang="ja-JP" altLang="en-US"/>
+          </a:p>
+        </p:txBody>
+      </p:sp>
+    </p:spTree>
+    <p:extLst>
+      <p:ext uri="{BB962C8B-B14F-4D97-AF65-F5344CB8AC3E}">
+        <p14:creationId xmlns:p14="http://schemas.microsoft.com/office/powerpoint/2010/main" val="1563909418"/>
+      </p:ext>
+    </p:extLst>
+  </p:cSld>
+  <p:clrMapOvr>
+    <a:masterClrMapping/>
+  </p:clrMapOvr>
+</p:notes>
+</file>
+
+<file path=ppt/notesSlides/notesSlide8.xml><?xml version="1.0" encoding="utf-8"?>
 <p:notes xmlns:a="http://schemas.openxmlformats.org/drawingml/2006/main" xmlns:r="http://schemas.openxmlformats.org/officeDocument/2006/relationships" xmlns:p="http://schemas.openxmlformats.org/presentationml/2006/main">
   <p:cSld>
     <p:spTree>
@@ -1352,7 +1793,7 @@
           <a:p>
             <a:fld id="{99F30D02-CB94-4A91-AF86-16FC66827DC2}" type="slidenum">
               <a:rPr kumimoji="1" lang="ja-JP" altLang="en-US" smtClean="0"/>
-              <a:t>6</a:t>
+              <a:t>9</a:t>
             </a:fld>
             <a:endParaRPr kumimoji="1" lang="ja-JP" altLang="en-US"/>
           </a:p>
@@ -1371,7 +1812,7 @@
 </p:notes>
 </file>
 
-<file path=ppt/notesSlides/notesSlide6.xml><?xml version="1.0" encoding="utf-8"?>
+<file path=ppt/notesSlides/notesSlide9.xml><?xml version="1.0" encoding="utf-8"?>
 <p:notes xmlns:a="http://schemas.openxmlformats.org/drawingml/2006/main" xmlns:r="http://schemas.openxmlformats.org/officeDocument/2006/relationships" xmlns:p="http://schemas.openxmlformats.org/presentationml/2006/main">
   <p:cSld>
     <p:spTree>
@@ -1491,7 +1932,7 @@
           <a:p>
             <a:fld id="{99F30D02-CB94-4A91-AF86-16FC66827DC2}" type="slidenum">
               <a:rPr kumimoji="1" lang="ja-JP" altLang="en-US" smtClean="0"/>
-              <a:t>7</a:t>
+              <a:t>10</a:t>
             </a:fld>
             <a:endParaRPr kumimoji="1" lang="ja-JP" altLang="en-US"/>
           </a:p>
@@ -1501,423 +1942,6 @@
     <p:extLst>
       <p:ext uri="{BB962C8B-B14F-4D97-AF65-F5344CB8AC3E}">
         <p14:creationId xmlns:p14="http://schemas.microsoft.com/office/powerpoint/2010/main" val="531241693"/>
-      </p:ext>
-    </p:extLst>
-  </p:cSld>
-  <p:clrMapOvr>
-    <a:masterClrMapping/>
-  </p:clrMapOvr>
-</p:notes>
-</file>
-
-<file path=ppt/notesSlides/notesSlide7.xml><?xml version="1.0" encoding="utf-8"?>
-<p:notes xmlns:a="http://schemas.openxmlformats.org/drawingml/2006/main" xmlns:r="http://schemas.openxmlformats.org/officeDocument/2006/relationships" xmlns:p="http://schemas.openxmlformats.org/presentationml/2006/main">
-  <p:cSld>
-    <p:spTree>
-      <p:nvGrpSpPr>
-        <p:cNvPr id="1" name="">
-          <a:extLst>
-            <a:ext uri="{FF2B5EF4-FFF2-40B4-BE49-F238E27FC236}">
-              <a16:creationId xmlns:a16="http://schemas.microsoft.com/office/drawing/2014/main" id="{7FAC1ADE-0D14-34F1-EF98-C4ED807AED2A}"/>
-            </a:ext>
-          </a:extLst>
-        </p:cNvPr>
-        <p:cNvGrpSpPr/>
-        <p:nvPr/>
-      </p:nvGrpSpPr>
-      <p:grpSpPr>
-        <a:xfrm>
-          <a:off x="0" y="0"/>
-          <a:ext cx="0" cy="0"/>
-          <a:chOff x="0" y="0"/>
-          <a:chExt cx="0" cy="0"/>
-        </a:xfrm>
-      </p:grpSpPr>
-      <p:sp>
-        <p:nvSpPr>
-          <p:cNvPr id="2" name="スライド イメージ プレースホルダー 1">
-            <a:extLst>
-              <a:ext uri="{FF2B5EF4-FFF2-40B4-BE49-F238E27FC236}">
-                <a16:creationId xmlns:a16="http://schemas.microsoft.com/office/drawing/2014/main" id="{32A08C4B-A107-3A45-50E7-6096350E22AF}"/>
-              </a:ext>
-            </a:extLst>
-          </p:cNvPr>
-          <p:cNvSpPr>
-            <a:spLocks noGrp="1" noRot="1" noChangeAspect="1"/>
-          </p:cNvSpPr>
-          <p:nvPr>
-            <p:ph type="sldImg"/>
-          </p:nvPr>
-        </p:nvSpPr>
-        <p:spPr/>
-      </p:sp>
-      <p:sp>
-        <p:nvSpPr>
-          <p:cNvPr id="3" name="ノート プレースホルダー 2">
-            <a:extLst>
-              <a:ext uri="{FF2B5EF4-FFF2-40B4-BE49-F238E27FC236}">
-                <a16:creationId xmlns:a16="http://schemas.microsoft.com/office/drawing/2014/main" id="{546E2206-BB7A-4E73-7CC5-CE50E26321FD}"/>
-              </a:ext>
-            </a:extLst>
-          </p:cNvPr>
-          <p:cNvSpPr>
-            <a:spLocks noGrp="1"/>
-          </p:cNvSpPr>
-          <p:nvPr>
-            <p:ph type="body" idx="1"/>
-          </p:nvPr>
-        </p:nvSpPr>
-        <p:spPr/>
-        <p:txBody>
-          <a:bodyPr/>
-          <a:lstStyle/>
-          <a:p>
-            <a:r>
-              <a:rPr kumimoji="1" lang="ja-JP" altLang="en-US" dirty="0"/>
-              <a:t>ここで、突然ですが、「缶サット甲子園」について説明します。</a:t>
-            </a:r>
-          </a:p>
-          <a:p>
-            <a:r>
-              <a:rPr kumimoji="1" lang="ja-JP" altLang="en-US" dirty="0"/>
-              <a:t>缶サット甲子園というのは、高校生たちが、模擬人工衛星</a:t>
-            </a:r>
-            <a:r>
-              <a:rPr kumimoji="1" lang="en-US" altLang="ja-JP" dirty="0" err="1"/>
-              <a:t>CanSat</a:t>
-            </a:r>
-            <a:r>
-              <a:rPr kumimoji="1" lang="ja-JP" altLang="en-US" dirty="0"/>
-              <a:t>を作って、ロケットで打ち上げ、地上に落下してくるまでに、缶サットに課したミッションが如何に斬新か、クールかを争う競技です。</a:t>
-            </a:r>
-          </a:p>
-          <a:p>
-            <a:r>
-              <a:rPr kumimoji="1" lang="ja-JP" altLang="en-US" dirty="0"/>
-              <a:t>この大会に参加する高校生たちが小さい</a:t>
-            </a:r>
-            <a:r>
-              <a:rPr kumimoji="1" lang="en-US" altLang="ja-JP" dirty="0" err="1"/>
-              <a:t>Wakayama.rb</a:t>
-            </a:r>
-            <a:r>
-              <a:rPr kumimoji="1" lang="ja-JP" altLang="en-US" dirty="0"/>
-              <a:t>ボードを採用してくれているので、それも一緒に紹介したいと思います。</a:t>
-            </a:r>
-          </a:p>
-        </p:txBody>
-      </p:sp>
-      <p:sp>
-        <p:nvSpPr>
-          <p:cNvPr id="4" name="スライド番号プレースホルダー 3">
-            <a:extLst>
-              <a:ext uri="{FF2B5EF4-FFF2-40B4-BE49-F238E27FC236}">
-                <a16:creationId xmlns:a16="http://schemas.microsoft.com/office/drawing/2014/main" id="{B0909AF8-DCD9-5757-06F4-3F1669EA843B}"/>
-              </a:ext>
-            </a:extLst>
-          </p:cNvPr>
-          <p:cNvSpPr>
-            <a:spLocks noGrp="1"/>
-          </p:cNvSpPr>
-          <p:nvPr>
-            <p:ph type="sldNum" sz="quarter" idx="5"/>
-          </p:nvPr>
-        </p:nvSpPr>
-        <p:spPr/>
-        <p:txBody>
-          <a:bodyPr/>
-          <a:lstStyle/>
-          <a:p>
-            <a:fld id="{99F30D02-CB94-4A91-AF86-16FC66827DC2}" type="slidenum">
-              <a:rPr kumimoji="1" lang="ja-JP" altLang="en-US" smtClean="0"/>
-              <a:t>8</a:t>
-            </a:fld>
-            <a:endParaRPr kumimoji="1" lang="ja-JP" altLang="en-US"/>
-          </a:p>
-        </p:txBody>
-      </p:sp>
-    </p:spTree>
-    <p:extLst>
-      <p:ext uri="{BB962C8B-B14F-4D97-AF65-F5344CB8AC3E}">
-        <p14:creationId xmlns:p14="http://schemas.microsoft.com/office/powerpoint/2010/main" val="3346830851"/>
-      </p:ext>
-    </p:extLst>
-  </p:cSld>
-  <p:clrMapOvr>
-    <a:masterClrMapping/>
-  </p:clrMapOvr>
-</p:notes>
-</file>
-
-<file path=ppt/notesSlides/notesSlide8.xml><?xml version="1.0" encoding="utf-8"?>
-<p:notes xmlns:a="http://schemas.openxmlformats.org/drawingml/2006/main" xmlns:r="http://schemas.openxmlformats.org/officeDocument/2006/relationships" xmlns:p="http://schemas.openxmlformats.org/presentationml/2006/main">
-  <p:cSld>
-    <p:spTree>
-      <p:nvGrpSpPr>
-        <p:cNvPr id="1" name="">
-          <a:extLst>
-            <a:ext uri="{FF2B5EF4-FFF2-40B4-BE49-F238E27FC236}">
-              <a16:creationId xmlns:a16="http://schemas.microsoft.com/office/drawing/2014/main" id="{DB11E496-E2F5-1AF0-DC25-201712580055}"/>
-            </a:ext>
-          </a:extLst>
-        </p:cNvPr>
-        <p:cNvGrpSpPr/>
-        <p:nvPr/>
-      </p:nvGrpSpPr>
-      <p:grpSpPr>
-        <a:xfrm>
-          <a:off x="0" y="0"/>
-          <a:ext cx="0" cy="0"/>
-          <a:chOff x="0" y="0"/>
-          <a:chExt cx="0" cy="0"/>
-        </a:xfrm>
-      </p:grpSpPr>
-      <p:sp>
-        <p:nvSpPr>
-          <p:cNvPr id="2" name="スライド イメージ プレースホルダー 1">
-            <a:extLst>
-              <a:ext uri="{FF2B5EF4-FFF2-40B4-BE49-F238E27FC236}">
-                <a16:creationId xmlns:a16="http://schemas.microsoft.com/office/drawing/2014/main" id="{BE7E8964-0D8D-7A43-E746-BA0DE988E6BB}"/>
-              </a:ext>
-            </a:extLst>
-          </p:cNvPr>
-          <p:cNvSpPr>
-            <a:spLocks noGrp="1" noRot="1" noChangeAspect="1"/>
-          </p:cNvSpPr>
-          <p:nvPr>
-            <p:ph type="sldImg"/>
-          </p:nvPr>
-        </p:nvSpPr>
-        <p:spPr/>
-      </p:sp>
-      <p:sp>
-        <p:nvSpPr>
-          <p:cNvPr id="3" name="ノート プレースホルダー 2">
-            <a:extLst>
-              <a:ext uri="{FF2B5EF4-FFF2-40B4-BE49-F238E27FC236}">
-                <a16:creationId xmlns:a16="http://schemas.microsoft.com/office/drawing/2014/main" id="{19D238E7-52C3-8AAD-10E6-849476A7B845}"/>
-              </a:ext>
-            </a:extLst>
-          </p:cNvPr>
-          <p:cNvSpPr>
-            <a:spLocks noGrp="1"/>
-          </p:cNvSpPr>
-          <p:nvPr>
-            <p:ph type="body" idx="1"/>
-          </p:nvPr>
-        </p:nvSpPr>
-        <p:spPr/>
-        <p:txBody>
-          <a:bodyPr/>
-          <a:lstStyle/>
-          <a:p>
-            <a:r>
-              <a:rPr kumimoji="1" lang="ja-JP" altLang="en-US" dirty="0"/>
-              <a:t>ここで、突然ですが、「缶サット甲子園」について説明します。</a:t>
-            </a:r>
-          </a:p>
-          <a:p>
-            <a:r>
-              <a:rPr kumimoji="1" lang="ja-JP" altLang="en-US" dirty="0"/>
-              <a:t>缶サット甲子園というのは、高校生たちが、模擬人工衛星</a:t>
-            </a:r>
-            <a:r>
-              <a:rPr kumimoji="1" lang="en-US" altLang="ja-JP" dirty="0" err="1"/>
-              <a:t>CanSat</a:t>
-            </a:r>
-            <a:r>
-              <a:rPr kumimoji="1" lang="ja-JP" altLang="en-US" dirty="0"/>
-              <a:t>を作って、ロケットで打ち上げ、地上に落下してくるまでに、缶サットに課したミッションが如何に斬新か、クールかを争う競技です。</a:t>
-            </a:r>
-          </a:p>
-          <a:p>
-            <a:r>
-              <a:rPr kumimoji="1" lang="ja-JP" altLang="en-US" dirty="0"/>
-              <a:t>この大会に参加する高校生たちが小さい</a:t>
-            </a:r>
-            <a:r>
-              <a:rPr kumimoji="1" lang="en-US" altLang="ja-JP" dirty="0" err="1"/>
-              <a:t>Wakayama.rb</a:t>
-            </a:r>
-            <a:r>
-              <a:rPr kumimoji="1" lang="ja-JP" altLang="en-US" dirty="0"/>
-              <a:t>ボードを採用してくれているので、それも一緒に紹介したいと思います。</a:t>
-            </a:r>
-          </a:p>
-        </p:txBody>
-      </p:sp>
-      <p:sp>
-        <p:nvSpPr>
-          <p:cNvPr id="4" name="スライド番号プレースホルダー 3">
-            <a:extLst>
-              <a:ext uri="{FF2B5EF4-FFF2-40B4-BE49-F238E27FC236}">
-                <a16:creationId xmlns:a16="http://schemas.microsoft.com/office/drawing/2014/main" id="{AFCD1ECC-23F7-DCA3-9603-23FA9EB55B1E}"/>
-              </a:ext>
-            </a:extLst>
-          </p:cNvPr>
-          <p:cNvSpPr>
-            <a:spLocks noGrp="1"/>
-          </p:cNvSpPr>
-          <p:nvPr>
-            <p:ph type="sldNum" sz="quarter" idx="5"/>
-          </p:nvPr>
-        </p:nvSpPr>
-        <p:spPr/>
-        <p:txBody>
-          <a:bodyPr/>
-          <a:lstStyle/>
-          <a:p>
-            <a:fld id="{99F30D02-CB94-4A91-AF86-16FC66827DC2}" type="slidenum">
-              <a:rPr kumimoji="1" lang="ja-JP" altLang="en-US" smtClean="0"/>
-              <a:t>9</a:t>
-            </a:fld>
-            <a:endParaRPr kumimoji="1" lang="ja-JP" altLang="en-US"/>
-          </a:p>
-        </p:txBody>
-      </p:sp>
-    </p:spTree>
-    <p:extLst>
-      <p:ext uri="{BB962C8B-B14F-4D97-AF65-F5344CB8AC3E}">
-        <p14:creationId xmlns:p14="http://schemas.microsoft.com/office/powerpoint/2010/main" val="3418574099"/>
-      </p:ext>
-    </p:extLst>
-  </p:cSld>
-  <p:clrMapOvr>
-    <a:masterClrMapping/>
-  </p:clrMapOvr>
-</p:notes>
-</file>
-
-<file path=ppt/notesSlides/notesSlide9.xml><?xml version="1.0" encoding="utf-8"?>
-<p:notes xmlns:a="http://schemas.openxmlformats.org/drawingml/2006/main" xmlns:r="http://schemas.openxmlformats.org/officeDocument/2006/relationships" xmlns:p="http://schemas.openxmlformats.org/presentationml/2006/main">
-  <p:cSld>
-    <p:spTree>
-      <p:nvGrpSpPr>
-        <p:cNvPr id="1" name="">
-          <a:extLst>
-            <a:ext uri="{FF2B5EF4-FFF2-40B4-BE49-F238E27FC236}">
-              <a16:creationId xmlns:a16="http://schemas.microsoft.com/office/drawing/2014/main" id="{65C06D72-85C6-1C5C-5511-824BC878DFF0}"/>
-            </a:ext>
-          </a:extLst>
-        </p:cNvPr>
-        <p:cNvGrpSpPr/>
-        <p:nvPr/>
-      </p:nvGrpSpPr>
-      <p:grpSpPr>
-        <a:xfrm>
-          <a:off x="0" y="0"/>
-          <a:ext cx="0" cy="0"/>
-          <a:chOff x="0" y="0"/>
-          <a:chExt cx="0" cy="0"/>
-        </a:xfrm>
-      </p:grpSpPr>
-      <p:sp>
-        <p:nvSpPr>
-          <p:cNvPr id="2" name="スライド イメージ プレースホルダー 1">
-            <a:extLst>
-              <a:ext uri="{FF2B5EF4-FFF2-40B4-BE49-F238E27FC236}">
-                <a16:creationId xmlns:a16="http://schemas.microsoft.com/office/drawing/2014/main" id="{80B10C4D-C0DF-1DE8-E462-277E4B671282}"/>
-              </a:ext>
-            </a:extLst>
-          </p:cNvPr>
-          <p:cNvSpPr>
-            <a:spLocks noGrp="1" noRot="1" noChangeAspect="1"/>
-          </p:cNvSpPr>
-          <p:nvPr>
-            <p:ph type="sldImg"/>
-          </p:nvPr>
-        </p:nvSpPr>
-        <p:spPr/>
-      </p:sp>
-      <p:sp>
-        <p:nvSpPr>
-          <p:cNvPr id="3" name="ノート プレースホルダー 2">
-            <a:extLst>
-              <a:ext uri="{FF2B5EF4-FFF2-40B4-BE49-F238E27FC236}">
-                <a16:creationId xmlns:a16="http://schemas.microsoft.com/office/drawing/2014/main" id="{4795EB34-3EC2-DE36-28E7-137678BB4FC7}"/>
-              </a:ext>
-            </a:extLst>
-          </p:cNvPr>
-          <p:cNvSpPr>
-            <a:spLocks noGrp="1"/>
-          </p:cNvSpPr>
-          <p:nvPr>
-            <p:ph type="body" idx="1"/>
-          </p:nvPr>
-        </p:nvSpPr>
-        <p:spPr/>
-        <p:txBody>
-          <a:bodyPr/>
-          <a:lstStyle/>
-          <a:p>
-            <a:r>
-              <a:rPr kumimoji="1" lang="ja-JP" altLang="en-US" dirty="0"/>
-              <a:t>ここで、突然ですが、「缶サット甲子園」について説明します。</a:t>
-            </a:r>
-          </a:p>
-          <a:p>
-            <a:r>
-              <a:rPr kumimoji="1" lang="ja-JP" altLang="en-US" dirty="0"/>
-              <a:t>缶サット甲子園というのは、高校生たちが、模擬人工衛星</a:t>
-            </a:r>
-            <a:r>
-              <a:rPr kumimoji="1" lang="en-US" altLang="ja-JP" dirty="0" err="1"/>
-              <a:t>CanSat</a:t>
-            </a:r>
-            <a:r>
-              <a:rPr kumimoji="1" lang="ja-JP" altLang="en-US" dirty="0"/>
-              <a:t>を作って、ロケットで打ち上げ、地上に落下してくるまでに、缶サットに課したミッションが如何に斬新か、クールかを争う競技です。</a:t>
-            </a:r>
-          </a:p>
-          <a:p>
-            <a:r>
-              <a:rPr kumimoji="1" lang="ja-JP" altLang="en-US" dirty="0"/>
-              <a:t>この大会に参加する高校生たちが小さい</a:t>
-            </a:r>
-            <a:r>
-              <a:rPr kumimoji="1" lang="en-US" altLang="ja-JP" dirty="0" err="1"/>
-              <a:t>Wakayama.rb</a:t>
-            </a:r>
-            <a:r>
-              <a:rPr kumimoji="1" lang="ja-JP" altLang="en-US" dirty="0"/>
-              <a:t>ボードを採用してくれているので、それも一緒に紹介したいと思います。</a:t>
-            </a:r>
-          </a:p>
-        </p:txBody>
-      </p:sp>
-      <p:sp>
-        <p:nvSpPr>
-          <p:cNvPr id="4" name="スライド番号プレースホルダー 3">
-            <a:extLst>
-              <a:ext uri="{FF2B5EF4-FFF2-40B4-BE49-F238E27FC236}">
-                <a16:creationId xmlns:a16="http://schemas.microsoft.com/office/drawing/2014/main" id="{8AEBF3B0-B65C-BAC1-6EF8-5B101C90D3B4}"/>
-              </a:ext>
-            </a:extLst>
-          </p:cNvPr>
-          <p:cNvSpPr>
-            <a:spLocks noGrp="1"/>
-          </p:cNvSpPr>
-          <p:nvPr>
-            <p:ph type="sldNum" sz="quarter" idx="5"/>
-          </p:nvPr>
-        </p:nvSpPr>
-        <p:spPr/>
-        <p:txBody>
-          <a:bodyPr/>
-          <a:lstStyle/>
-          <a:p>
-            <a:fld id="{99F30D02-CB94-4A91-AF86-16FC66827DC2}" type="slidenum">
-              <a:rPr kumimoji="1" lang="ja-JP" altLang="en-US" smtClean="0"/>
-              <a:t>10</a:t>
-            </a:fld>
-            <a:endParaRPr kumimoji="1" lang="ja-JP" altLang="en-US"/>
-          </a:p>
-        </p:txBody>
-      </p:sp>
-    </p:spTree>
-    <p:extLst>
-      <p:ext uri="{BB962C8B-B14F-4D97-AF65-F5344CB8AC3E}">
-        <p14:creationId xmlns:p14="http://schemas.microsoft.com/office/powerpoint/2010/main" val="2781742138"/>
       </p:ext>
     </p:extLst>
   </p:cSld>
@@ -2308,7 +2332,7 @@
           <a:p>
             <a:fld id="{18270001-7513-495D-A82D-45B596600A74}" type="datetime1">
               <a:rPr kumimoji="1" lang="ja-JP" altLang="en-US" smtClean="0"/>
-              <a:t>2026/7/2</a:t>
+              <a:t>2026/7/3</a:t>
             </a:fld>
             <a:endParaRPr kumimoji="1" lang="ja-JP" altLang="en-US"/>
           </a:p>
@@ -2574,7 +2598,7 @@
           <a:p>
             <a:fld id="{9F1865BE-6B6E-42FF-9C4F-9C1ADAC4DF26}" type="datetime1">
               <a:rPr kumimoji="1" lang="ja-JP" altLang="en-US" smtClean="0"/>
-              <a:t>2026/7/2</a:t>
+              <a:t>2026/7/3</a:t>
             </a:fld>
             <a:endParaRPr kumimoji="1" lang="ja-JP" altLang="en-US"/>
           </a:p>
@@ -2824,7 +2848,7 @@
           <a:p>
             <a:fld id="{9276DC7A-3F10-4B7D-93A8-452FAC4D686D}" type="datetime1">
               <a:rPr kumimoji="1" lang="ja-JP" altLang="en-US" smtClean="0"/>
-              <a:t>2026/7/2</a:t>
+              <a:t>2026/7/3</a:t>
             </a:fld>
             <a:endParaRPr kumimoji="1" lang="ja-JP" altLang="en-US"/>
           </a:p>
@@ -3132,7 +3156,7 @@
           <a:p>
             <a:fld id="{E1EABD12-64D3-4EBE-8D2C-43D693D99709}" type="datetime1">
               <a:rPr kumimoji="1" lang="ja-JP" altLang="en-US" smtClean="0"/>
-              <a:t>2026/7/2</a:t>
+              <a:t>2026/7/3</a:t>
             </a:fld>
             <a:endParaRPr kumimoji="1" lang="ja-JP" altLang="en-US"/>
           </a:p>
@@ -3450,7 +3474,7 @@
           <a:p>
             <a:fld id="{B55A2179-E127-416E-949F-2936325D6D19}" type="datetime1">
               <a:rPr kumimoji="1" lang="ja-JP" altLang="en-US" smtClean="0"/>
-              <a:t>2026/7/2</a:t>
+              <a:t>2026/7/3</a:t>
             </a:fld>
             <a:endParaRPr kumimoji="1" lang="ja-JP" altLang="en-US"/>
           </a:p>
@@ -3752,7 +3776,7 @@
           <a:p>
             <a:fld id="{7C6BC515-E5D5-4A35-8EAE-0B5E4BDFF349}" type="datetime1">
               <a:rPr kumimoji="1" lang="ja-JP" altLang="en-US" smtClean="0"/>
-              <a:t>2026/7/2</a:t>
+              <a:t>2026/7/3</a:t>
             </a:fld>
             <a:endParaRPr kumimoji="1" lang="ja-JP" altLang="en-US"/>
           </a:p>
@@ -4119,7 +4143,7 @@
           <a:p>
             <a:fld id="{2B7A7E2C-79E6-47C1-B6A5-3E7144F9AD99}" type="datetime1">
               <a:rPr kumimoji="1" lang="ja-JP" altLang="en-US" smtClean="0"/>
-              <a:t>2026/7/2</a:t>
+              <a:t>2026/7/3</a:t>
             </a:fld>
             <a:endParaRPr kumimoji="1" lang="ja-JP" altLang="en-US"/>
           </a:p>
@@ -4337,7 +4361,7 @@
           <a:p>
             <a:fld id="{9997EEC7-AAC5-45B2-AA53-2E95B7D875DF}" type="datetime1">
               <a:rPr kumimoji="1" lang="ja-JP" altLang="en-US" smtClean="0"/>
-              <a:t>2026/7/2</a:t>
+              <a:t>2026/7/3</a:t>
             </a:fld>
             <a:endParaRPr kumimoji="1" lang="ja-JP" altLang="en-US"/>
           </a:p>
@@ -4555,7 +4579,7 @@
           <a:p>
             <a:fld id="{8E79FCBA-7A3E-4412-A358-A284411A6FE8}" type="datetime1">
               <a:rPr kumimoji="1" lang="ja-JP" altLang="en-US" smtClean="0"/>
-              <a:t>2026/7/2</a:t>
+              <a:t>2026/7/3</a:t>
             </a:fld>
             <a:endParaRPr kumimoji="1" lang="ja-JP" altLang="en-US"/>
           </a:p>
@@ -4767,7 +4791,7 @@
           <a:p>
             <a:fld id="{AF86629A-ED80-4405-9047-A28BA8D7CF23}" type="datetime1">
               <a:rPr kumimoji="1" lang="ja-JP" altLang="en-US" smtClean="0"/>
-              <a:t>2026/7/2</a:t>
+              <a:t>2026/7/3</a:t>
             </a:fld>
             <a:endParaRPr kumimoji="1" lang="ja-JP" altLang="en-US"/>
           </a:p>
@@ -5017,7 +5041,7 @@
           <a:p>
             <a:fld id="{ECD204FE-B1F2-46F9-8D71-6DB416073EC7}" type="datetime1">
               <a:rPr kumimoji="1" lang="ja-JP" altLang="en-US" smtClean="0"/>
-              <a:t>2026/7/2</a:t>
+              <a:t>2026/7/3</a:t>
             </a:fld>
             <a:endParaRPr kumimoji="1" lang="ja-JP" altLang="en-US"/>
           </a:p>
@@ -5328,7 +5352,7 @@
           <a:p>
             <a:fld id="{0C9AA92B-A36D-42A4-B072-51D8C6EBD4C0}" type="datetime1">
               <a:rPr kumimoji="1" lang="ja-JP" altLang="en-US" smtClean="0"/>
-              <a:t>2026/7/2</a:t>
+              <a:t>2026/7/3</a:t>
             </a:fld>
             <a:endParaRPr kumimoji="1" lang="ja-JP" altLang="en-US"/>
           </a:p>
@@ -5781,7 +5805,7 @@
           <a:p>
             <a:fld id="{9F964363-AF5F-47E8-907D-EB9E5487FC23}" type="datetime1">
               <a:rPr kumimoji="1" lang="ja-JP" altLang="en-US" smtClean="0"/>
-              <a:t>2026/7/2</a:t>
+              <a:t>2026/7/3</a:t>
             </a:fld>
             <a:endParaRPr kumimoji="1" lang="ja-JP" altLang="en-US"/>
           </a:p>
@@ -5910,7 +5934,7 @@
           <a:p>
             <a:fld id="{7E5EE5FB-CE28-404F-AE7E-CE139579E101}" type="datetime1">
               <a:rPr kumimoji="1" lang="ja-JP" altLang="en-US" smtClean="0"/>
-              <a:t>2026/7/2</a:t>
+              <a:t>2026/7/3</a:t>
             </a:fld>
             <a:endParaRPr kumimoji="1" lang="ja-JP" altLang="en-US"/>
           </a:p>
@@ -6005,7 +6029,7 @@
           <a:p>
             <a:fld id="{1F15C589-A6A9-48E2-8F24-BE60FFD30E16}" type="datetime1">
               <a:rPr kumimoji="1" lang="ja-JP" altLang="en-US" smtClean="0"/>
-              <a:t>2026/7/2</a:t>
+              <a:t>2026/7/3</a:t>
             </a:fld>
             <a:endParaRPr kumimoji="1" lang="ja-JP" altLang="en-US"/>
           </a:p>
@@ -6292,7 +6316,7 @@
           <a:p>
             <a:fld id="{D6932043-CA65-45CF-91A5-19D31A66B892}" type="datetime1">
               <a:rPr kumimoji="1" lang="ja-JP" altLang="en-US" smtClean="0"/>
-              <a:t>2026/7/2</a:t>
+              <a:t>2026/7/3</a:t>
             </a:fld>
             <a:endParaRPr kumimoji="1" lang="ja-JP" altLang="en-US"/>
           </a:p>
@@ -6575,7 +6599,7 @@
           <a:p>
             <a:fld id="{C5817F8C-E835-4FDA-B51D-489A9808742C}" type="datetime1">
               <a:rPr kumimoji="1" lang="ja-JP" altLang="en-US" smtClean="0"/>
-              <a:t>2026/7/2</a:t>
+              <a:t>2026/7/3</a:t>
             </a:fld>
             <a:endParaRPr kumimoji="1" lang="ja-JP" altLang="en-US"/>
           </a:p>
@@ -7021,7 +7045,7 @@
           <a:p>
             <a:fld id="{F1AC51BD-3909-4258-A020-CE99C0BEBAFE}" type="datetime1">
               <a:rPr kumimoji="1" lang="ja-JP" altLang="en-US" smtClean="0"/>
-              <a:t>2026/7/2</a:t>
+              <a:t>2026/7/3</a:t>
             </a:fld>
             <a:endParaRPr kumimoji="1" lang="ja-JP" altLang="en-US"/>
           </a:p>
@@ -7746,7 +7770,7 @@
         <p:cNvPr id="1" name="">
           <a:extLst>
             <a:ext uri="{FF2B5EF4-FFF2-40B4-BE49-F238E27FC236}">
-              <a16:creationId xmlns:a16="http://schemas.microsoft.com/office/drawing/2014/main" id="{3AF225D3-3B4F-C7B1-7EA3-55361AF32FEB}"/>
+              <a16:creationId xmlns:a16="http://schemas.microsoft.com/office/drawing/2014/main" id="{D17ED9B1-D803-A0F5-E97E-7318DB0A4B97}"/>
             </a:ext>
           </a:extLst>
         </p:cNvPr>
@@ -7766,7 +7790,7 @@
           <p:cNvPr id="6" name="テキスト ボックス 5">
             <a:extLst>
               <a:ext uri="{FF2B5EF4-FFF2-40B4-BE49-F238E27FC236}">
-                <a16:creationId xmlns:a16="http://schemas.microsoft.com/office/drawing/2014/main" id="{69B9B54C-473F-908D-94CB-78A2CF644FDD}"/>
+                <a16:creationId xmlns:a16="http://schemas.microsoft.com/office/drawing/2014/main" id="{ACA5DD04-51C4-F1AB-52F5-008342476C62}"/>
               </a:ext>
             </a:extLst>
           </p:cNvPr>
@@ -7809,10 +7833,10 @@
       </p:sp>
       <p:sp>
         <p:nvSpPr>
-          <p:cNvPr id="3" name="テキスト ボックス 2">
+          <p:cNvPr id="12" name="テキスト ボックス 11">
             <a:extLst>
               <a:ext uri="{FF2B5EF4-FFF2-40B4-BE49-F238E27FC236}">
-                <a16:creationId xmlns:a16="http://schemas.microsoft.com/office/drawing/2014/main" id="{B041CB09-E0B8-FD51-D392-098766732DC7}"/>
+                <a16:creationId xmlns:a16="http://schemas.microsoft.com/office/drawing/2014/main" id="{C257C446-B8E8-3B9A-D90D-4D9778889EA2}"/>
               </a:ext>
             </a:extLst>
           </p:cNvPr>
@@ -7821,111 +7845,8 @@
         </p:nvSpPr>
         <p:spPr>
           <a:xfrm>
-            <a:off x="3672679" y="2682723"/>
-            <a:ext cx="4890940" cy="2246769"/>
-          </a:xfrm>
-          <a:prstGeom prst="rect">
-            <a:avLst/>
-          </a:prstGeom>
-          <a:solidFill>
-            <a:srgbClr val="FFFFFF">
-              <a:alpha val="50000"/>
-            </a:srgbClr>
-          </a:solidFill>
-          <a:ln w="38100" cmpd="thickThin">
-            <a:solidFill>
-              <a:srgbClr val="9E0000"/>
-            </a:solidFill>
-          </a:ln>
-        </p:spPr>
-        <p:txBody>
-          <a:bodyPr wrap="square" rtlCol="0">
-            <a:spAutoFit/>
-          </a:bodyPr>
-          <a:lstStyle/>
-          <a:p>
-            <a:pPr algn="ctr"/>
-            <a:r>
-              <a:rPr kumimoji="1" lang="ja-JP" altLang="en-US" sz="2800" dirty="0">
-                <a:solidFill>
-                  <a:srgbClr val="C00000"/>
-                </a:solidFill>
-                <a:latin typeface="源ノ角ゴシック JP Bold" panose="020B0800000000000000" pitchFamily="34" charset="-128"/>
-                <a:ea typeface="源ノ角ゴシック JP Bold" panose="020B0800000000000000" pitchFamily="34" charset="-128"/>
-              </a:rPr>
-              <a:t>このような、</a:t>
-            </a:r>
-          </a:p>
-          <a:p>
-            <a:pPr algn="ctr"/>
-            <a:r>
-              <a:rPr kumimoji="1" lang="ja-JP" altLang="en-US" sz="2800" dirty="0">
-                <a:solidFill>
-                  <a:srgbClr val="C00000"/>
-                </a:solidFill>
-                <a:latin typeface="源ノ角ゴシック JP Bold" panose="020B0800000000000000" pitchFamily="34" charset="-128"/>
-                <a:ea typeface="源ノ角ゴシック JP Bold" panose="020B0800000000000000" pitchFamily="34" charset="-128"/>
-              </a:rPr>
-              <a:t>輪ゴムで止めて、</a:t>
-            </a:r>
-          </a:p>
-          <a:p>
-            <a:pPr algn="ctr"/>
-            <a:r>
-              <a:rPr kumimoji="1" lang="ja-JP" altLang="en-US" sz="2800" dirty="0">
-                <a:solidFill>
-                  <a:srgbClr val="C00000"/>
-                </a:solidFill>
-                <a:latin typeface="源ノ角ゴシック JP Bold" panose="020B0800000000000000" pitchFamily="34" charset="-128"/>
-                <a:ea typeface="源ノ角ゴシック JP Bold" panose="020B0800000000000000" pitchFamily="34" charset="-128"/>
-              </a:rPr>
-              <a:t>中がスカスカの</a:t>
-            </a:r>
-          </a:p>
-          <a:p>
-            <a:pPr algn="ctr"/>
-            <a:r>
-              <a:rPr kumimoji="1" lang="ja-JP" altLang="en-US" sz="2800" dirty="0">
-                <a:solidFill>
-                  <a:srgbClr val="C00000"/>
-                </a:solidFill>
-                <a:latin typeface="源ノ角ゴシック JP Bold" panose="020B0800000000000000" pitchFamily="34" charset="-128"/>
-                <a:ea typeface="源ノ角ゴシック JP Bold" panose="020B0800000000000000" pitchFamily="34" charset="-128"/>
-              </a:rPr>
-              <a:t>缶サットは、</a:t>
-            </a:r>
-          </a:p>
-          <a:p>
-            <a:pPr algn="ctr"/>
-            <a:r>
-              <a:rPr kumimoji="1" lang="ja-JP" altLang="en-US" sz="2800" dirty="0">
-                <a:solidFill>
-                  <a:srgbClr val="C00000"/>
-                </a:solidFill>
-                <a:latin typeface="源ノ角ゴシック JP Bold" panose="020B0800000000000000" pitchFamily="34" charset="-128"/>
-                <a:ea typeface="源ノ角ゴシック JP Bold" panose="020B0800000000000000" pitchFamily="34" charset="-128"/>
-              </a:rPr>
-              <a:t>決して、作らないように！</a:t>
-            </a:r>
-          </a:p>
-        </p:txBody>
-      </p:sp>
-      <p:sp>
-        <p:nvSpPr>
-          <p:cNvPr id="5" name="テキスト ボックス 4">
-            <a:extLst>
-              <a:ext uri="{FF2B5EF4-FFF2-40B4-BE49-F238E27FC236}">
-                <a16:creationId xmlns:a16="http://schemas.microsoft.com/office/drawing/2014/main" id="{8FAB82AC-F4DC-CCA6-E3CE-F100FDB8C989}"/>
-              </a:ext>
-            </a:extLst>
-          </p:cNvPr>
-          <p:cNvSpPr txBox="1"/>
-          <p:nvPr/>
-        </p:nvSpPr>
-        <p:spPr>
-          <a:xfrm>
-            <a:off x="3585594" y="1289352"/>
-            <a:ext cx="3433515" cy="400110"/>
+            <a:off x="1714423" y="1078486"/>
+            <a:ext cx="1028785" cy="400110"/>
           </a:xfrm>
           <a:prstGeom prst="rect">
             <a:avLst/>
@@ -7943,54 +7864,53 @@
           <a:lstStyle/>
           <a:p>
             <a:r>
-              <a:rPr kumimoji="1" lang="en-US" altLang="ja-JP" sz="2000" dirty="0">
+              <a:rPr kumimoji="1" lang="ja-JP" altLang="en-US" sz="2000" dirty="0">
                 <a:solidFill>
                   <a:srgbClr val="C00000"/>
                 </a:solidFill>
                 <a:latin typeface="源ノ角ゴシック JP Bold" panose="020B0800000000000000" pitchFamily="34" charset="-128"/>
                 <a:ea typeface="源ノ角ゴシック JP Bold" panose="020B0800000000000000" pitchFamily="34" charset="-128"/>
               </a:rPr>
-              <a:t>246.5g </a:t>
-            </a:r>
-            <a:r>
-              <a:rPr kumimoji="1" lang="ja-JP" altLang="en-US" sz="2000" dirty="0">
-                <a:solidFill>
-                  <a:srgbClr val="C00000"/>
-                </a:solidFill>
-                <a:latin typeface="源ノ角ゴシック JP Bold" panose="020B0800000000000000" pitchFamily="34" charset="-128"/>
-                <a:ea typeface="源ノ角ゴシック JP Bold" panose="020B0800000000000000" pitchFamily="34" charset="-128"/>
-              </a:rPr>
-              <a:t>なので、</a:t>
-            </a:r>
-            <a:r>
-              <a:rPr kumimoji="1" lang="en-US" altLang="ja-JP" sz="2000" dirty="0">
-                <a:solidFill>
-                  <a:srgbClr val="C00000"/>
-                </a:solidFill>
-                <a:latin typeface="源ノ角ゴシック JP Bold" panose="020B0800000000000000" pitchFamily="34" charset="-128"/>
-                <a:ea typeface="源ノ角ゴシック JP Bold" panose="020B0800000000000000" pitchFamily="34" charset="-128"/>
-              </a:rPr>
-              <a:t>3.5g</a:t>
-            </a:r>
-            <a:r>
-              <a:rPr kumimoji="1" lang="ja-JP" altLang="en-US" sz="2000" dirty="0">
-                <a:solidFill>
-                  <a:srgbClr val="C00000"/>
-                </a:solidFill>
-                <a:latin typeface="源ノ角ゴシック JP Bold" panose="020B0800000000000000" pitchFamily="34" charset="-128"/>
-                <a:ea typeface="源ノ角ゴシック JP Bold" panose="020B0800000000000000" pitchFamily="34" charset="-128"/>
-              </a:rPr>
-              <a:t> 軽い。</a:t>
-            </a:r>
+              <a:t>入った</a:t>
+            </a:r>
+          </a:p>
+        </p:txBody>
+      </p:sp>
+      <p:sp>
+        <p:nvSpPr>
+          <p:cNvPr id="2" name="スライド番号プレースホルダー 1">
+            <a:extLst>
+              <a:ext uri="{FF2B5EF4-FFF2-40B4-BE49-F238E27FC236}">
+                <a16:creationId xmlns:a16="http://schemas.microsoft.com/office/drawing/2014/main" id="{47F74D4E-01EA-1C09-1B5D-A96327D80991}"/>
+              </a:ext>
+            </a:extLst>
+          </p:cNvPr>
+          <p:cNvSpPr>
+            <a:spLocks noGrp="1"/>
+          </p:cNvSpPr>
+          <p:nvPr>
+            <p:ph type="sldNum" sz="quarter" idx="12"/>
+          </p:nvPr>
+        </p:nvSpPr>
+        <p:spPr/>
+        <p:txBody>
+          <a:bodyPr/>
+          <a:lstStyle/>
+          <a:p>
+            <a:fld id="{A100B93A-21FB-4666-B0C5-EFD3C8C641C6}" type="slidenum">
+              <a:rPr kumimoji="1" lang="ja-JP" altLang="en-US" smtClean="0"/>
+              <a:t>10</a:t>
+            </a:fld>
+            <a:endParaRPr kumimoji="1" lang="ja-JP" altLang="en-US"/>
           </a:p>
         </p:txBody>
       </p:sp>
       <p:pic>
         <p:nvPicPr>
-          <p:cNvPr id="9" name="図 8">
+          <p:cNvPr id="13" name="図 12">
             <a:extLst>
               <a:ext uri="{FF2B5EF4-FFF2-40B4-BE49-F238E27FC236}">
-                <a16:creationId xmlns:a16="http://schemas.microsoft.com/office/drawing/2014/main" id="{99B3DC92-BD38-2C55-546A-31573F83F660}"/>
+                <a16:creationId xmlns:a16="http://schemas.microsoft.com/office/drawing/2014/main" id="{446C214A-9BD8-183F-B5A1-8B28887F4889}"/>
               </a:ext>
             </a:extLst>
           </p:cNvPr>
@@ -8013,47 +7933,109 @@
         </p:blipFill>
         <p:spPr>
           <a:xfrm>
-            <a:off x="484586" y="1018777"/>
-            <a:ext cx="2807254" cy="5748527"/>
+            <a:off x="613229" y="1478596"/>
+            <a:ext cx="3277198" cy="4852613"/>
           </a:xfrm>
           <a:prstGeom prst="rect">
             <a:avLst/>
           </a:prstGeom>
         </p:spPr>
       </p:pic>
-      <p:sp>
-        <p:nvSpPr>
-          <p:cNvPr id="2" name="スライド番号プレースホルダー 1">
+      <p:pic>
+        <p:nvPicPr>
+          <p:cNvPr id="15" name="図 14">
             <a:extLst>
               <a:ext uri="{FF2B5EF4-FFF2-40B4-BE49-F238E27FC236}">
-                <a16:creationId xmlns:a16="http://schemas.microsoft.com/office/drawing/2014/main" id="{AE0619B8-A921-ABCE-8BEB-AC8E06ACEF15}"/>
+                <a16:creationId xmlns:a16="http://schemas.microsoft.com/office/drawing/2014/main" id="{0005BCB6-CD57-EC7C-9D98-934AA63885E6}"/>
               </a:ext>
             </a:extLst>
           </p:cNvPr>
-          <p:cNvSpPr>
-            <a:spLocks noGrp="1"/>
-          </p:cNvSpPr>
-          <p:nvPr>
-            <p:ph type="sldNum" sz="quarter" idx="12"/>
-          </p:nvPr>
-        </p:nvSpPr>
-        <p:spPr/>
-        <p:txBody>
-          <a:bodyPr/>
-          <a:lstStyle/>
-          <a:p>
-            <a:fld id="{A100B93A-21FB-4666-B0C5-EFD3C8C641C6}" type="slidenum">
-              <a:rPr kumimoji="1" lang="ja-JP" altLang="en-US" smtClean="0"/>
-              <a:t>10</a:t>
-            </a:fld>
-            <a:endParaRPr kumimoji="1" lang="ja-JP" altLang="en-US"/>
+          <p:cNvPicPr>
+            <a:picLocks noChangeAspect="1"/>
+          </p:cNvPicPr>
+          <p:nvPr/>
+        </p:nvPicPr>
+        <p:blipFill>
+          <a:blip r:embed="rId4" cstate="screen">
+            <a:extLst>
+              <a:ext uri="{28A0092B-C50C-407E-A947-70E740481C1C}">
+                <a14:useLocalDpi xmlns:a14="http://schemas.microsoft.com/office/drawing/2010/main"/>
+              </a:ext>
+            </a:extLst>
+          </a:blip>
+          <a:stretch>
+            <a:fillRect/>
+          </a:stretch>
+        </p:blipFill>
+        <p:spPr>
+          <a:xfrm>
+            <a:off x="4526844" y="1478596"/>
+            <a:ext cx="3589861" cy="4852613"/>
+          </a:xfrm>
+          <a:prstGeom prst="rect">
+            <a:avLst/>
+          </a:prstGeom>
+        </p:spPr>
+      </p:pic>
+      <p:sp>
+        <p:nvSpPr>
+          <p:cNvPr id="16" name="テキスト ボックス 15">
+            <a:extLst>
+              <a:ext uri="{FF2B5EF4-FFF2-40B4-BE49-F238E27FC236}">
+                <a16:creationId xmlns:a16="http://schemas.microsoft.com/office/drawing/2014/main" id="{686D1A2F-F564-61FE-904E-2AE90B30B53E}"/>
+              </a:ext>
+            </a:extLst>
+          </p:cNvPr>
+          <p:cNvSpPr txBox="1"/>
+          <p:nvPr/>
+        </p:nvSpPr>
+        <p:spPr>
+          <a:xfrm>
+            <a:off x="5253575" y="1094526"/>
+            <a:ext cx="2541293" cy="400110"/>
+          </a:xfrm>
+          <a:prstGeom prst="rect">
+            <a:avLst/>
+          </a:prstGeom>
+          <a:solidFill>
+            <a:srgbClr val="FFFFFF">
+              <a:alpha val="50000"/>
+            </a:srgbClr>
+          </a:solidFill>
+        </p:spPr>
+        <p:txBody>
+          <a:bodyPr wrap="square" rtlCol="0">
+            <a:spAutoFit/>
+          </a:bodyPr>
+          <a:lstStyle/>
+          <a:p>
+            <a:r>
+              <a:rPr kumimoji="1" lang="en-US" altLang="ja-JP" sz="2000" dirty="0">
+                <a:solidFill>
+                  <a:srgbClr val="C00000"/>
+                </a:solidFill>
+                <a:latin typeface="源ノ角ゴシック JP Bold" panose="020B0800000000000000" pitchFamily="34" charset="-128"/>
+                <a:ea typeface="源ノ角ゴシック JP Bold" panose="020B0800000000000000" pitchFamily="34" charset="-128"/>
+              </a:rPr>
+              <a:t>GPS</a:t>
+            </a:r>
+            <a:r>
+              <a:rPr kumimoji="1" lang="ja-JP" altLang="en-US" sz="2000" dirty="0">
+                <a:solidFill>
+                  <a:srgbClr val="C00000"/>
+                </a:solidFill>
+                <a:latin typeface="源ノ角ゴシック JP Bold" panose="020B0800000000000000" pitchFamily="34" charset="-128"/>
+                <a:ea typeface="源ノ角ゴシック JP Bold" panose="020B0800000000000000" pitchFamily="34" charset="-128"/>
+              </a:rPr>
+              <a:t>も取れてる</a:t>
+            </a:r>
           </a:p>
         </p:txBody>
       </p:sp>
     </p:spTree>
     <p:extLst>
       <p:ext uri="{BB962C8B-B14F-4D97-AF65-F5344CB8AC3E}">
-        <p14:creationId xmlns:p14="http://schemas.microsoft.com/office/powerpoint/2010/main" val="3485832371"/>
+        <p14:creationId xmlns:p14="http://schemas.microsoft.com/office/powerpoint/2010/main" val="1641613236"/>
       </p:ext>
     </p:extLst>
   </p:cSld>
@@ -8076,7 +8058,13 @@
   <p:cSld>
     <p:spTree>
       <p:nvGrpSpPr>
-        <p:cNvPr id="1" name=""/>
+        <p:cNvPr id="1" name="">
+          <a:extLst>
+            <a:ext uri="{FF2B5EF4-FFF2-40B4-BE49-F238E27FC236}">
+              <a16:creationId xmlns:a16="http://schemas.microsoft.com/office/drawing/2014/main" id="{28A1F688-8EDF-2F4B-595D-DEC00EC682CE}"/>
+            </a:ext>
+          </a:extLst>
+        </p:cNvPr>
         <p:cNvGrpSpPr/>
         <p:nvPr/>
       </p:nvGrpSpPr>
@@ -8093,7 +8081,7 @@
           <p:cNvPr id="6" name="テキスト ボックス 5">
             <a:extLst>
               <a:ext uri="{FF2B5EF4-FFF2-40B4-BE49-F238E27FC236}">
-                <a16:creationId xmlns:a16="http://schemas.microsoft.com/office/drawing/2014/main" id="{4ECC6058-D9D0-C478-268D-4AF289E311D3}"/>
+                <a16:creationId xmlns:a16="http://schemas.microsoft.com/office/drawing/2014/main" id="{43EA5655-9748-7DB0-5DD1-48088F826EB1}"/>
               </a:ext>
             </a:extLst>
           </p:cNvPr>
@@ -8139,7 +8127,7 @@
           <p:cNvPr id="3" name="テキスト ボックス 2">
             <a:extLst>
               <a:ext uri="{FF2B5EF4-FFF2-40B4-BE49-F238E27FC236}">
-                <a16:creationId xmlns:a16="http://schemas.microsoft.com/office/drawing/2014/main" id="{DC56F4AC-3314-23AD-CDE1-4FF523F17C76}"/>
+                <a16:creationId xmlns:a16="http://schemas.microsoft.com/office/drawing/2014/main" id="{C2B60FC3-8DC2-513D-A7C2-7EF3C1F7C740}"/>
               </a:ext>
             </a:extLst>
           </p:cNvPr>
@@ -8148,8 +8136,8 @@
         </p:nvSpPr>
         <p:spPr>
           <a:xfrm>
-            <a:off x="3702852" y="1303833"/>
-            <a:ext cx="4542460" cy="1015663"/>
+            <a:off x="619039" y="1498357"/>
+            <a:ext cx="3523721" cy="400110"/>
           </a:xfrm>
           <a:prstGeom prst="rect">
             <a:avLst/>
@@ -8174,17 +8162,17 @@
                 <a:latin typeface="源ノ角ゴシック JP Bold" panose="020B0800000000000000" pitchFamily="34" charset="-128"/>
                 <a:ea typeface="源ノ角ゴシック JP Bold" panose="020B0800000000000000" pitchFamily="34" charset="-128"/>
               </a:rPr>
-              <a:t>上昇、解放、落下中に、基板などが動かないように、隙間にはスポンジなどを詰めて、余分な空間を作らない。</a:t>
-            </a:r>
-          </a:p>
-        </p:txBody>
-      </p:sp>
-      <p:sp>
-        <p:nvSpPr>
-          <p:cNvPr id="9" name="テキスト ボックス 8">
+              <a:t>パラシュートの固定穴空け</a:t>
+            </a:r>
+          </a:p>
+        </p:txBody>
+      </p:sp>
+      <p:sp>
+        <p:nvSpPr>
+          <p:cNvPr id="5" name="テキスト ボックス 4">
             <a:extLst>
               <a:ext uri="{FF2B5EF4-FFF2-40B4-BE49-F238E27FC236}">
-                <a16:creationId xmlns:a16="http://schemas.microsoft.com/office/drawing/2014/main" id="{6A533EFA-AD3C-2006-F5D5-57FAC66C7A01}"/>
+                <a16:creationId xmlns:a16="http://schemas.microsoft.com/office/drawing/2014/main" id="{3465252A-258C-0B1B-79A9-830F73DE675D}"/>
               </a:ext>
             </a:extLst>
           </p:cNvPr>
@@ -8193,8 +8181,8 @@
         </p:nvSpPr>
         <p:spPr>
           <a:xfrm>
-            <a:off x="3702852" y="2590228"/>
-            <a:ext cx="4542460" cy="1015663"/>
+            <a:off x="4475474" y="1498357"/>
+            <a:ext cx="4049487" cy="400110"/>
           </a:xfrm>
           <a:prstGeom prst="rect">
             <a:avLst/>
@@ -8212,221 +8200,24 @@
           <a:lstStyle/>
           <a:p>
             <a:r>
-              <a:rPr kumimoji="1" lang="en-US" altLang="ja-JP" sz="2000" dirty="0" err="1">
+              <a:rPr kumimoji="1" lang="ja-JP" altLang="en-US" sz="2000" dirty="0">
                 <a:solidFill>
                   <a:srgbClr val="C00000"/>
                 </a:solidFill>
                 <a:latin typeface="源ノ角ゴシック JP Bold" panose="020B0800000000000000" pitchFamily="34" charset="-128"/>
                 <a:ea typeface="源ノ角ゴシック JP Bold" panose="020B0800000000000000" pitchFamily="34" charset="-128"/>
               </a:rPr>
-              <a:t>OpenLog</a:t>
-            </a:r>
-            <a:r>
-              <a:rPr kumimoji="1" lang="ja-JP" altLang="en-US" sz="2000" dirty="0">
-                <a:solidFill>
-                  <a:srgbClr val="C00000"/>
-                </a:solidFill>
-                <a:latin typeface="源ノ角ゴシック JP Bold" panose="020B0800000000000000" pitchFamily="34" charset="-128"/>
-                <a:ea typeface="源ノ角ゴシック JP Bold" panose="020B0800000000000000" pitchFamily="34" charset="-128"/>
-              </a:rPr>
-              <a:t>とカメラの</a:t>
-            </a:r>
-            <a:r>
-              <a:rPr kumimoji="1" lang="en-US" altLang="ja-JP" sz="2000" dirty="0">
-                <a:solidFill>
-                  <a:srgbClr val="C00000"/>
-                </a:solidFill>
-                <a:latin typeface="源ノ角ゴシック JP Bold" panose="020B0800000000000000" pitchFamily="34" charset="-128"/>
-                <a:ea typeface="源ノ角ゴシック JP Bold" panose="020B0800000000000000" pitchFamily="34" charset="-128"/>
-              </a:rPr>
-              <a:t>SD</a:t>
-            </a:r>
-            <a:r>
-              <a:rPr kumimoji="1" lang="ja-JP" altLang="en-US" sz="2000" dirty="0">
-                <a:solidFill>
-                  <a:srgbClr val="C00000"/>
-                </a:solidFill>
-                <a:latin typeface="源ノ角ゴシック JP Bold" panose="020B0800000000000000" pitchFamily="34" charset="-128"/>
-                <a:ea typeface="源ノ角ゴシック JP Bold" panose="020B0800000000000000" pitchFamily="34" charset="-128"/>
-              </a:rPr>
-              <a:t>カードが抜けたり、接点が外れたりしないように、テープでしっかり止める。</a:t>
-            </a:r>
-          </a:p>
-        </p:txBody>
-      </p:sp>
-      <p:sp>
-        <p:nvSpPr>
-          <p:cNvPr id="10" name="テキスト ボックス 9">
+              <a:t>タミヤのプッシュリベットで固定</a:t>
+            </a:r>
+          </a:p>
+        </p:txBody>
+      </p:sp>
+      <p:pic>
+        <p:nvPicPr>
+          <p:cNvPr id="4" name="図 3">
             <a:extLst>
               <a:ext uri="{FF2B5EF4-FFF2-40B4-BE49-F238E27FC236}">
-                <a16:creationId xmlns:a16="http://schemas.microsoft.com/office/drawing/2014/main" id="{20E07B61-FB06-E917-ED10-D9098160D40E}"/>
-              </a:ext>
-            </a:extLst>
-          </p:cNvPr>
-          <p:cNvSpPr txBox="1"/>
-          <p:nvPr/>
-        </p:nvSpPr>
-        <p:spPr>
-          <a:xfrm>
-            <a:off x="3702852" y="3909727"/>
-            <a:ext cx="4542460" cy="707886"/>
-          </a:xfrm>
-          <a:prstGeom prst="rect">
-            <a:avLst/>
-          </a:prstGeom>
-          <a:solidFill>
-            <a:srgbClr val="FFFFFF">
-              <a:alpha val="50000"/>
-            </a:srgbClr>
-          </a:solidFill>
-        </p:spPr>
-        <p:txBody>
-          <a:bodyPr wrap="square" rtlCol="0">
-            <a:spAutoFit/>
-          </a:bodyPr>
-          <a:lstStyle/>
-          <a:p>
-            <a:r>
-              <a:rPr kumimoji="1" lang="ja-JP" altLang="en-US" sz="2000" dirty="0">
-                <a:solidFill>
-                  <a:srgbClr val="C00000"/>
-                </a:solidFill>
-                <a:latin typeface="源ノ角ゴシック JP Bold" panose="020B0800000000000000" pitchFamily="34" charset="-128"/>
-                <a:ea typeface="源ノ角ゴシック JP Bold" panose="020B0800000000000000" pitchFamily="34" charset="-128"/>
-              </a:rPr>
-              <a:t>配線も抜けたりしないように、テープでしっかり止める。</a:t>
-            </a:r>
-          </a:p>
-        </p:txBody>
-      </p:sp>
-      <p:sp>
-        <p:nvSpPr>
-          <p:cNvPr id="11" name="テキスト ボックス 10">
-            <a:extLst>
-              <a:ext uri="{FF2B5EF4-FFF2-40B4-BE49-F238E27FC236}">
-                <a16:creationId xmlns:a16="http://schemas.microsoft.com/office/drawing/2014/main" id="{ABACF15B-AEE5-9D6A-BA50-1444E8CEDE5B}"/>
-              </a:ext>
-            </a:extLst>
-          </p:cNvPr>
-          <p:cNvSpPr txBox="1"/>
-          <p:nvPr/>
-        </p:nvSpPr>
-        <p:spPr>
-          <a:xfrm>
-            <a:off x="3702852" y="4921449"/>
-            <a:ext cx="4542460" cy="1015663"/>
-          </a:xfrm>
-          <a:prstGeom prst="rect">
-            <a:avLst/>
-          </a:prstGeom>
-          <a:solidFill>
-            <a:srgbClr val="FFFFFF">
-              <a:alpha val="50000"/>
-            </a:srgbClr>
-          </a:solidFill>
-        </p:spPr>
-        <p:txBody>
-          <a:bodyPr wrap="square" rtlCol="0">
-            <a:spAutoFit/>
-          </a:bodyPr>
-          <a:lstStyle/>
-          <a:p>
-            <a:r>
-              <a:rPr kumimoji="1" lang="ja-JP" altLang="en-US" sz="2000" dirty="0">
-                <a:solidFill>
-                  <a:srgbClr val="C00000"/>
-                </a:solidFill>
-                <a:latin typeface="源ノ角ゴシック JP Bold" panose="020B0800000000000000" pitchFamily="34" charset="-128"/>
-                <a:ea typeface="源ノ角ゴシック JP Bold" panose="020B0800000000000000" pitchFamily="34" charset="-128"/>
-              </a:rPr>
-              <a:t>落下の衝撃を弱めるために、缶サットの底</a:t>
-            </a:r>
-            <a:r>
-              <a:rPr kumimoji="1" lang="en-US" altLang="ja-JP" sz="2000" dirty="0">
-                <a:solidFill>
-                  <a:srgbClr val="C00000"/>
-                </a:solidFill>
-                <a:latin typeface="源ノ角ゴシック JP Bold" panose="020B0800000000000000" pitchFamily="34" charset="-128"/>
-                <a:ea typeface="源ノ角ゴシック JP Bold" panose="020B0800000000000000" pitchFamily="34" charset="-128"/>
-              </a:rPr>
-              <a:t>(</a:t>
-            </a:r>
-            <a:r>
-              <a:rPr kumimoji="1" lang="ja-JP" altLang="en-US" sz="2000" dirty="0">
-                <a:solidFill>
-                  <a:srgbClr val="C00000"/>
-                </a:solidFill>
-                <a:latin typeface="源ノ角ゴシック JP Bold" panose="020B0800000000000000" pitchFamily="34" charset="-128"/>
-                <a:ea typeface="源ノ角ゴシック JP Bold" panose="020B0800000000000000" pitchFamily="34" charset="-128"/>
-              </a:rPr>
-              <a:t>外側</a:t>
-            </a:r>
-            <a:r>
-              <a:rPr kumimoji="1" lang="en-US" altLang="ja-JP" sz="2000" dirty="0">
-                <a:solidFill>
-                  <a:srgbClr val="C00000"/>
-                </a:solidFill>
-                <a:latin typeface="源ノ角ゴシック JP Bold" panose="020B0800000000000000" pitchFamily="34" charset="-128"/>
-                <a:ea typeface="源ノ角ゴシック JP Bold" panose="020B0800000000000000" pitchFamily="34" charset="-128"/>
-              </a:rPr>
-              <a:t>)</a:t>
-            </a:r>
-            <a:r>
-              <a:rPr kumimoji="1" lang="ja-JP" altLang="en-US" sz="2000" dirty="0">
-                <a:solidFill>
-                  <a:srgbClr val="C00000"/>
-                </a:solidFill>
-                <a:latin typeface="源ノ角ゴシック JP Bold" panose="020B0800000000000000" pitchFamily="34" charset="-128"/>
-                <a:ea typeface="源ノ角ゴシック JP Bold" panose="020B0800000000000000" pitchFamily="34" charset="-128"/>
-              </a:rPr>
-              <a:t>に緩衝材を取り付けても良い。</a:t>
-            </a:r>
-            <a:r>
-              <a:rPr kumimoji="1" lang="en-US" altLang="ja-JP" sz="2000" dirty="0">
-                <a:solidFill>
-                  <a:srgbClr val="C00000"/>
-                </a:solidFill>
-                <a:latin typeface="源ノ角ゴシック JP Bold" panose="020B0800000000000000" pitchFamily="34" charset="-128"/>
-                <a:ea typeface="源ノ角ゴシック JP Bold" panose="020B0800000000000000" pitchFamily="34" charset="-128"/>
-              </a:rPr>
-              <a:t>(</a:t>
-            </a:r>
-            <a:r>
-              <a:rPr kumimoji="1" lang="ja-JP" altLang="en-US" sz="2000" dirty="0">
-                <a:solidFill>
-                  <a:srgbClr val="C00000"/>
-                </a:solidFill>
-                <a:latin typeface="源ノ角ゴシック JP Bold" panose="020B0800000000000000" pitchFamily="34" charset="-128"/>
-                <a:ea typeface="源ノ角ゴシック JP Bold" panose="020B0800000000000000" pitchFamily="34" charset="-128"/>
-              </a:rPr>
-              <a:t>カメラを避けてね</a:t>
-            </a:r>
-            <a:r>
-              <a:rPr kumimoji="1" lang="en-US" altLang="ja-JP" sz="2000" dirty="0">
-                <a:solidFill>
-                  <a:srgbClr val="C00000"/>
-                </a:solidFill>
-                <a:latin typeface="源ノ角ゴシック JP Bold" panose="020B0800000000000000" pitchFamily="34" charset="-128"/>
-                <a:ea typeface="源ノ角ゴシック JP Bold" panose="020B0800000000000000" pitchFamily="34" charset="-128"/>
-              </a:rPr>
-              <a:t>)</a:t>
-            </a:r>
-            <a:endParaRPr kumimoji="1" lang="ja-JP" altLang="en-US" sz="2000" dirty="0">
-              <a:solidFill>
-                <a:srgbClr val="C00000"/>
-              </a:solidFill>
-              <a:latin typeface="源ノ角ゴシック JP Bold" panose="020B0800000000000000" pitchFamily="34" charset="-128"/>
-              <a:ea typeface="源ノ角ゴシック JP Bold" panose="020B0800000000000000" pitchFamily="34" charset="-128"/>
-            </a:endParaRPr>
-          </a:p>
-        </p:txBody>
-      </p:sp>
-      <p:pic>
-        <p:nvPicPr>
-          <p:cNvPr id="2" name="図 1">
-            <a:extLst>
-              <a:ext uri="{FF2B5EF4-FFF2-40B4-BE49-F238E27FC236}">
-                <a16:creationId xmlns:a16="http://schemas.microsoft.com/office/drawing/2014/main" id="{5E96A994-EB21-395A-1F8A-1D58BDB8F675}"/>
+                <a16:creationId xmlns:a16="http://schemas.microsoft.com/office/drawing/2014/main" id="{FC74BB8B-2B05-777A-A133-472C5D141C29}"/>
               </a:ext>
             </a:extLst>
           </p:cNvPr>
@@ -8449,20 +8240,56 @@
         </p:blipFill>
         <p:spPr>
           <a:xfrm>
-            <a:off x="484586" y="1018777"/>
-            <a:ext cx="2807254" cy="5748527"/>
+            <a:off x="340398" y="1991886"/>
+            <a:ext cx="3566396" cy="4550229"/>
           </a:xfrm>
           <a:prstGeom prst="rect">
             <a:avLst/>
           </a:prstGeom>
         </p:spPr>
       </p:pic>
-      <p:sp>
-        <p:nvSpPr>
-          <p:cNvPr id="4" name="スライド番号プレースホルダー 3">
+      <p:pic>
+        <p:nvPicPr>
+          <p:cNvPr id="9" name="図 8">
             <a:extLst>
               <a:ext uri="{FF2B5EF4-FFF2-40B4-BE49-F238E27FC236}">
-                <a16:creationId xmlns:a16="http://schemas.microsoft.com/office/drawing/2014/main" id="{8E239DF9-6D39-81D0-46A3-D0854AC20140}"/>
+                <a16:creationId xmlns:a16="http://schemas.microsoft.com/office/drawing/2014/main" id="{F10C70E9-B856-1FC9-337B-75E44ED242CA}"/>
+              </a:ext>
+            </a:extLst>
+          </p:cNvPr>
+          <p:cNvPicPr>
+            <a:picLocks noChangeAspect="1"/>
+          </p:cNvPicPr>
+          <p:nvPr/>
+        </p:nvPicPr>
+        <p:blipFill>
+          <a:blip r:embed="rId4" cstate="screen">
+            <a:extLst>
+              <a:ext uri="{28A0092B-C50C-407E-A947-70E740481C1C}">
+                <a14:useLocalDpi xmlns:a14="http://schemas.microsoft.com/office/drawing/2010/main"/>
+              </a:ext>
+            </a:extLst>
+          </a:blip>
+          <a:stretch>
+            <a:fillRect/>
+          </a:stretch>
+        </p:blipFill>
+        <p:spPr>
+          <a:xfrm>
+            <a:off x="4571999" y="1991887"/>
+            <a:ext cx="3907990" cy="4548674"/>
+          </a:xfrm>
+          <a:prstGeom prst="rect">
+            <a:avLst/>
+          </a:prstGeom>
+        </p:spPr>
+      </p:pic>
+      <p:sp>
+        <p:nvSpPr>
+          <p:cNvPr id="2" name="スライド番号プレースホルダー 1">
+            <a:extLst>
+              <a:ext uri="{FF2B5EF4-FFF2-40B4-BE49-F238E27FC236}">
+                <a16:creationId xmlns:a16="http://schemas.microsoft.com/office/drawing/2014/main" id="{B7C7A296-158B-01B2-37DC-75020FAA8924}"/>
               </a:ext>
             </a:extLst>
           </p:cNvPr>
@@ -8489,7 +8316,7 @@
     </p:spTree>
     <p:extLst>
       <p:ext uri="{BB962C8B-B14F-4D97-AF65-F5344CB8AC3E}">
-        <p14:creationId xmlns:p14="http://schemas.microsoft.com/office/powerpoint/2010/main" val="1875254375"/>
+        <p14:creationId xmlns:p14="http://schemas.microsoft.com/office/powerpoint/2010/main" val="282082073"/>
       </p:ext>
     </p:extLst>
   </p:cSld>
@@ -8890,7 +8717,13 @@
   <p:cSld>
     <p:spTree>
       <p:nvGrpSpPr>
-        <p:cNvPr id="1" name=""/>
+        <p:cNvPr id="1" name="">
+          <a:extLst>
+            <a:ext uri="{FF2B5EF4-FFF2-40B4-BE49-F238E27FC236}">
+              <a16:creationId xmlns:a16="http://schemas.microsoft.com/office/drawing/2014/main" id="{AE77D94E-186E-0949-F577-80F8991BA808}"/>
+            </a:ext>
+          </a:extLst>
+        </p:cNvPr>
         <p:cNvGrpSpPr/>
         <p:nvPr/>
       </p:nvGrpSpPr>
@@ -8907,7 +8740,7 @@
           <p:cNvPr id="6" name="テキスト ボックス 5">
             <a:extLst>
               <a:ext uri="{FF2B5EF4-FFF2-40B4-BE49-F238E27FC236}">
-                <a16:creationId xmlns:a16="http://schemas.microsoft.com/office/drawing/2014/main" id="{4ECC6058-D9D0-C478-268D-4AF289E311D3}"/>
+                <a16:creationId xmlns:a16="http://schemas.microsoft.com/office/drawing/2014/main" id="{9C1BA087-BFD0-71CB-C470-9510DC08630B}"/>
               </a:ext>
             </a:extLst>
           </p:cNvPr>
@@ -8953,6 +8786,356 @@
           <p:cNvPr id="8" name="テキスト ボックス 7">
             <a:extLst>
               <a:ext uri="{FF2B5EF4-FFF2-40B4-BE49-F238E27FC236}">
+                <a16:creationId xmlns:a16="http://schemas.microsoft.com/office/drawing/2014/main" id="{FBB17486-6AF8-705E-B392-36C20667544C}"/>
+              </a:ext>
+            </a:extLst>
+          </p:cNvPr>
+          <p:cNvSpPr txBox="1"/>
+          <p:nvPr/>
+        </p:nvSpPr>
+        <p:spPr>
+          <a:xfrm>
+            <a:off x="114473" y="271462"/>
+            <a:ext cx="3079485" cy="400110"/>
+          </a:xfrm>
+          <a:prstGeom prst="rect">
+            <a:avLst/>
+          </a:prstGeom>
+          <a:solidFill>
+            <a:srgbClr val="FFFFFF">
+              <a:alpha val="50000"/>
+            </a:srgbClr>
+          </a:solidFill>
+        </p:spPr>
+        <p:txBody>
+          <a:bodyPr wrap="square" rtlCol="0">
+            <a:spAutoFit/>
+          </a:bodyPr>
+          <a:lstStyle/>
+          <a:p>
+            <a:r>
+              <a:rPr kumimoji="1" lang="en-US" altLang="ja-JP" sz="2000" dirty="0">
+                <a:solidFill>
+                  <a:srgbClr val="C00000"/>
+                </a:solidFill>
+                <a:latin typeface="源ノ角ゴシック JP Bold" panose="020B0800000000000000" pitchFamily="34" charset="-128"/>
+                <a:ea typeface="源ノ角ゴシック JP Bold" panose="020B0800000000000000" pitchFamily="34" charset="-128"/>
+              </a:rPr>
+              <a:t>M3</a:t>
+            </a:r>
+            <a:r>
+              <a:rPr kumimoji="1" lang="ja-JP" altLang="en-US" sz="2000" dirty="0">
+                <a:solidFill>
+                  <a:srgbClr val="C00000"/>
+                </a:solidFill>
+                <a:latin typeface="源ノ角ゴシック JP Bold" panose="020B0800000000000000" pitchFamily="34" charset="-128"/>
+                <a:ea typeface="源ノ角ゴシック JP Bold" panose="020B0800000000000000" pitchFamily="34" charset="-128"/>
+              </a:rPr>
+              <a:t>の穴を</a:t>
+            </a:r>
+            <a:r>
+              <a:rPr kumimoji="1" lang="en-US" altLang="ja-JP" sz="2000" dirty="0">
+                <a:solidFill>
+                  <a:srgbClr val="C00000"/>
+                </a:solidFill>
+                <a:latin typeface="源ノ角ゴシック JP Bold" panose="020B0800000000000000" pitchFamily="34" charset="-128"/>
+                <a:ea typeface="源ノ角ゴシック JP Bold" panose="020B0800000000000000" pitchFamily="34" charset="-128"/>
+              </a:rPr>
+              <a:t>4</a:t>
+            </a:r>
+            <a:r>
+              <a:rPr kumimoji="1" lang="ja-JP" altLang="en-US" sz="2000" dirty="0">
+                <a:solidFill>
+                  <a:srgbClr val="C00000"/>
+                </a:solidFill>
+                <a:latin typeface="源ノ角ゴシック JP Bold" panose="020B0800000000000000" pitchFamily="34" charset="-128"/>
+                <a:ea typeface="源ノ角ゴシック JP Bold" panose="020B0800000000000000" pitchFamily="34" charset="-128"/>
+              </a:rPr>
+              <a:t>カ所あけます。</a:t>
+            </a:r>
+          </a:p>
+        </p:txBody>
+      </p:sp>
+      <p:sp>
+        <p:nvSpPr>
+          <p:cNvPr id="11" name="テキスト ボックス 10">
+            <a:extLst>
+              <a:ext uri="{FF2B5EF4-FFF2-40B4-BE49-F238E27FC236}">
+                <a16:creationId xmlns:a16="http://schemas.microsoft.com/office/drawing/2014/main" id="{41E261F5-6983-B549-036F-D060A4DF6E14}"/>
+              </a:ext>
+            </a:extLst>
+          </p:cNvPr>
+          <p:cNvSpPr txBox="1"/>
+          <p:nvPr/>
+        </p:nvSpPr>
+        <p:spPr>
+          <a:xfrm>
+            <a:off x="5692493" y="973050"/>
+            <a:ext cx="2040717" cy="400110"/>
+          </a:xfrm>
+          <a:prstGeom prst="rect">
+            <a:avLst/>
+          </a:prstGeom>
+          <a:solidFill>
+            <a:srgbClr val="FFFFFF">
+              <a:alpha val="50000"/>
+            </a:srgbClr>
+          </a:solidFill>
+        </p:spPr>
+        <p:txBody>
+          <a:bodyPr wrap="square" rtlCol="0">
+            <a:spAutoFit/>
+          </a:bodyPr>
+          <a:lstStyle/>
+          <a:p>
+            <a:r>
+              <a:rPr kumimoji="1" lang="ja-JP" altLang="en-US" sz="2000" dirty="0">
+                <a:solidFill>
+                  <a:srgbClr val="C00000"/>
+                </a:solidFill>
+                <a:latin typeface="源ノ角ゴシック JP Bold" panose="020B0800000000000000" pitchFamily="34" charset="-128"/>
+                <a:ea typeface="源ノ角ゴシック JP Bold" panose="020B0800000000000000" pitchFamily="34" charset="-128"/>
+              </a:rPr>
+              <a:t>カットします</a:t>
+            </a:r>
+          </a:p>
+        </p:txBody>
+      </p:sp>
+      <p:sp>
+        <p:nvSpPr>
+          <p:cNvPr id="2" name="スライド番号プレースホルダー 1">
+            <a:extLst>
+              <a:ext uri="{FF2B5EF4-FFF2-40B4-BE49-F238E27FC236}">
+                <a16:creationId xmlns:a16="http://schemas.microsoft.com/office/drawing/2014/main" id="{CCF341AD-2A75-76B8-C2DF-63000B6673C5}"/>
+              </a:ext>
+            </a:extLst>
+          </p:cNvPr>
+          <p:cNvSpPr>
+            <a:spLocks noGrp="1"/>
+          </p:cNvSpPr>
+          <p:nvPr>
+            <p:ph type="sldNum" sz="quarter" idx="12"/>
+          </p:nvPr>
+        </p:nvSpPr>
+        <p:spPr/>
+        <p:txBody>
+          <a:bodyPr/>
+          <a:lstStyle/>
+          <a:p>
+            <a:fld id="{A100B93A-21FB-4666-B0C5-EFD3C8C641C6}" type="slidenum">
+              <a:rPr kumimoji="1" lang="ja-JP" altLang="en-US" smtClean="0"/>
+              <a:t>3</a:t>
+            </a:fld>
+            <a:endParaRPr kumimoji="1" lang="ja-JP" altLang="en-US"/>
+          </a:p>
+        </p:txBody>
+      </p:sp>
+      <p:pic>
+        <p:nvPicPr>
+          <p:cNvPr id="4" name="図 3">
+            <a:extLst>
+              <a:ext uri="{FF2B5EF4-FFF2-40B4-BE49-F238E27FC236}">
+                <a16:creationId xmlns:a16="http://schemas.microsoft.com/office/drawing/2014/main" id="{9B5D440E-851C-31E3-A603-29C5041B34A6}"/>
+              </a:ext>
+            </a:extLst>
+          </p:cNvPr>
+          <p:cNvPicPr>
+            <a:picLocks noChangeAspect="1"/>
+          </p:cNvPicPr>
+          <p:nvPr/>
+        </p:nvPicPr>
+        <p:blipFill>
+          <a:blip r:embed="rId3" cstate="screen">
+            <a:extLst>
+              <a:ext uri="{28A0092B-C50C-407E-A947-70E740481C1C}">
+                <a14:useLocalDpi xmlns:a14="http://schemas.microsoft.com/office/drawing/2010/main"/>
+              </a:ext>
+            </a:extLst>
+          </a:blip>
+          <a:stretch>
+            <a:fillRect/>
+          </a:stretch>
+        </p:blipFill>
+        <p:spPr>
+          <a:xfrm>
+            <a:off x="592285" y="1459079"/>
+            <a:ext cx="3582726" cy="4193177"/>
+          </a:xfrm>
+          <a:prstGeom prst="rect">
+            <a:avLst/>
+          </a:prstGeom>
+        </p:spPr>
+      </p:pic>
+      <p:sp>
+        <p:nvSpPr>
+          <p:cNvPr id="7" name="テキスト ボックス 6">
+            <a:extLst>
+              <a:ext uri="{FF2B5EF4-FFF2-40B4-BE49-F238E27FC236}">
+                <a16:creationId xmlns:a16="http://schemas.microsoft.com/office/drawing/2014/main" id="{DDB6AEEE-06D8-FD35-2CDA-685B3155DE39}"/>
+              </a:ext>
+            </a:extLst>
+          </p:cNvPr>
+          <p:cNvSpPr txBox="1"/>
+          <p:nvPr/>
+        </p:nvSpPr>
+        <p:spPr>
+          <a:xfrm>
+            <a:off x="702717" y="1058969"/>
+            <a:ext cx="3582726" cy="400110"/>
+          </a:xfrm>
+          <a:prstGeom prst="rect">
+            <a:avLst/>
+          </a:prstGeom>
+          <a:solidFill>
+            <a:srgbClr val="FFFFFF">
+              <a:alpha val="50000"/>
+            </a:srgbClr>
+          </a:solidFill>
+        </p:spPr>
+        <p:txBody>
+          <a:bodyPr wrap="square" rtlCol="0">
+            <a:spAutoFit/>
+          </a:bodyPr>
+          <a:lstStyle/>
+          <a:p>
+            <a:r>
+              <a:rPr kumimoji="1" lang="ja-JP" altLang="en-US" sz="2000" dirty="0">
+                <a:solidFill>
+                  <a:srgbClr val="C00000"/>
+                </a:solidFill>
+                <a:latin typeface="源ノ角ゴシック JP Bold" panose="020B0800000000000000" pitchFamily="34" charset="-128"/>
+                <a:ea typeface="源ノ角ゴシック JP Bold" panose="020B0800000000000000" pitchFamily="34" charset="-128"/>
+              </a:rPr>
+              <a:t>水平になるように線引きして</a:t>
+            </a:r>
+          </a:p>
+        </p:txBody>
+      </p:sp>
+      <p:pic>
+        <p:nvPicPr>
+          <p:cNvPr id="12" name="図 11">
+            <a:extLst>
+              <a:ext uri="{FF2B5EF4-FFF2-40B4-BE49-F238E27FC236}">
+                <a16:creationId xmlns:a16="http://schemas.microsoft.com/office/drawing/2014/main" id="{DF147249-AAEA-597D-045A-4BC1062A3A00}"/>
+              </a:ext>
+            </a:extLst>
+          </p:cNvPr>
+          <p:cNvPicPr>
+            <a:picLocks noChangeAspect="1"/>
+          </p:cNvPicPr>
+          <p:nvPr/>
+        </p:nvPicPr>
+        <p:blipFill>
+          <a:blip r:embed="rId4" cstate="screen">
+            <a:extLst>
+              <a:ext uri="{28A0092B-C50C-407E-A947-70E740481C1C}">
+                <a14:useLocalDpi xmlns:a14="http://schemas.microsoft.com/office/drawing/2010/main"/>
+              </a:ext>
+            </a:extLst>
+          </a:blip>
+          <a:stretch>
+            <a:fillRect/>
+          </a:stretch>
+        </p:blipFill>
+        <p:spPr>
+          <a:xfrm>
+            <a:off x="5319413" y="1392103"/>
+            <a:ext cx="2413797" cy="5025659"/>
+          </a:xfrm>
+          <a:prstGeom prst="rect">
+            <a:avLst/>
+          </a:prstGeom>
+        </p:spPr>
+      </p:pic>
+    </p:spTree>
+    <p:extLst>
+      <p:ext uri="{BB962C8B-B14F-4D97-AF65-F5344CB8AC3E}">
+        <p14:creationId xmlns:p14="http://schemas.microsoft.com/office/powerpoint/2010/main" val="3154692777"/>
+      </p:ext>
+    </p:extLst>
+  </p:cSld>
+  <p:clrMapOvr>
+    <a:masterClrMapping/>
+  </p:clrMapOvr>
+  <mc:AlternateContent xmlns:mc="http://schemas.openxmlformats.org/markup-compatibility/2006">
+    <mc:Choice xmlns:p14="http://schemas.microsoft.com/office/powerpoint/2010/main" Requires="p14">
+      <p:transition spd="slow" p14:dur="2000" advTm="2324"/>
+    </mc:Choice>
+    <mc:Fallback>
+      <p:transition spd="slow" advTm="2324"/>
+    </mc:Fallback>
+  </mc:AlternateContent>
+</p:sld>
+</file>
+
+<file path=ppt/slides/slide4.xml><?xml version="1.0" encoding="utf-8"?>
+<p:sld xmlns:a="http://schemas.openxmlformats.org/drawingml/2006/main" xmlns:r="http://schemas.openxmlformats.org/officeDocument/2006/relationships" xmlns:p="http://schemas.openxmlformats.org/presentationml/2006/main" showMasterSp="0">
+  <p:cSld>
+    <p:spTree>
+      <p:nvGrpSpPr>
+        <p:cNvPr id="1" name=""/>
+        <p:cNvGrpSpPr/>
+        <p:nvPr/>
+      </p:nvGrpSpPr>
+      <p:grpSpPr>
+        <a:xfrm>
+          <a:off x="0" y="0"/>
+          <a:ext cx="0" cy="0"/>
+          <a:chOff x="0" y="0"/>
+          <a:chExt cx="0" cy="0"/>
+        </a:xfrm>
+      </p:grpSpPr>
+      <p:sp>
+        <p:nvSpPr>
+          <p:cNvPr id="6" name="テキスト ボックス 5">
+            <a:extLst>
+              <a:ext uri="{FF2B5EF4-FFF2-40B4-BE49-F238E27FC236}">
+                <a16:creationId xmlns:a16="http://schemas.microsoft.com/office/drawing/2014/main" id="{4ECC6058-D9D0-C478-268D-4AF289E311D3}"/>
+              </a:ext>
+            </a:extLst>
+          </p:cNvPr>
+          <p:cNvSpPr txBox="1"/>
+          <p:nvPr/>
+        </p:nvSpPr>
+        <p:spPr>
+          <a:xfrm>
+            <a:off x="1714423" y="317440"/>
+            <a:ext cx="5715153" cy="584775"/>
+          </a:xfrm>
+          <a:prstGeom prst="rect">
+            <a:avLst/>
+          </a:prstGeom>
+          <a:solidFill>
+            <a:srgbClr val="FFFFFF">
+              <a:alpha val="50000"/>
+            </a:srgbClr>
+          </a:solidFill>
+        </p:spPr>
+        <p:txBody>
+          <a:bodyPr wrap="square" rtlCol="0">
+            <a:spAutoFit/>
+          </a:bodyPr>
+          <a:lstStyle/>
+          <a:p>
+            <a:pPr algn="ctr"/>
+            <a:r>
+              <a:rPr kumimoji="1" lang="ja-JP" altLang="en-US" sz="3200" dirty="0">
+                <a:solidFill>
+                  <a:srgbClr val="C00000"/>
+                </a:solidFill>
+                <a:latin typeface="源ノ角ゴシック JP Bold" panose="020B0800000000000000" pitchFamily="34" charset="-128"/>
+                <a:ea typeface="源ノ角ゴシック JP Bold" panose="020B0800000000000000" pitchFamily="34" charset="-128"/>
+              </a:rPr>
+              <a:t>ペットボトル缶サット</a:t>
+            </a:r>
+          </a:p>
+        </p:txBody>
+      </p:sp>
+      <p:sp>
+        <p:nvSpPr>
+          <p:cNvPr id="8" name="テキスト ボックス 7">
+            <a:extLst>
+              <a:ext uri="{FF2B5EF4-FFF2-40B4-BE49-F238E27FC236}">
                 <a16:creationId xmlns:a16="http://schemas.microsoft.com/office/drawing/2014/main" id="{5E9BC02F-0751-5EFF-7ADD-74CF6785CE92}"/>
               </a:ext>
             </a:extLst>
@@ -8988,7 +9171,7 @@
                 <a:latin typeface="源ノ角ゴシック JP Bold" panose="020B0800000000000000" pitchFamily="34" charset="-128"/>
                 <a:ea typeface="源ノ角ゴシック JP Bold" panose="020B0800000000000000" pitchFamily="34" charset="-128"/>
               </a:rPr>
-              <a:t>M3</a:t>
+              <a:t>3.2mm</a:t>
             </a:r>
             <a:r>
               <a:rPr kumimoji="1" lang="ja-JP" altLang="en-US" sz="2000" dirty="0">
@@ -8998,27 +9181,7 @@
                 <a:latin typeface="源ノ角ゴシック JP Bold" panose="020B0800000000000000" pitchFamily="34" charset="-128"/>
                 <a:ea typeface="源ノ角ゴシック JP Bold" panose="020B0800000000000000" pitchFamily="34" charset="-128"/>
               </a:rPr>
-              <a:t>の穴を</a:t>
-            </a:r>
-            <a:r>
-              <a:rPr kumimoji="1" lang="en-US" altLang="ja-JP" sz="2000" dirty="0">
-                <a:solidFill>
-                  <a:srgbClr val="C00000"/>
-                </a:solidFill>
-                <a:latin typeface="源ノ角ゴシック JP Bold" panose="020B0800000000000000" pitchFamily="34" charset="-128"/>
-                <a:ea typeface="源ノ角ゴシック JP Bold" panose="020B0800000000000000" pitchFamily="34" charset="-128"/>
-              </a:rPr>
-              <a:t>4</a:t>
-            </a:r>
-            <a:r>
-              <a:rPr kumimoji="1" lang="ja-JP" altLang="en-US" sz="2000" dirty="0">
-                <a:solidFill>
-                  <a:srgbClr val="C00000"/>
-                </a:solidFill>
-                <a:latin typeface="源ノ角ゴシック JP Bold" panose="020B0800000000000000" pitchFamily="34" charset="-128"/>
-                <a:ea typeface="源ノ角ゴシック JP Bold" panose="020B0800000000000000" pitchFamily="34" charset="-128"/>
-              </a:rPr>
-              <a:t>カ所あけます。</a:t>
+              <a:t>の穴をあけます。</a:t>
             </a:r>
           </a:p>
         </p:txBody>
@@ -9163,7 +9326,7 @@
           <a:p>
             <a:fld id="{A100B93A-21FB-4666-B0C5-EFD3C8C641C6}" type="slidenum">
               <a:rPr kumimoji="1" lang="ja-JP" altLang="en-US" smtClean="0"/>
-              <a:t>3</a:t>
+              <a:t>4</a:t>
             </a:fld>
             <a:endParaRPr kumimoji="1" lang="ja-JP" altLang="en-US"/>
           </a:p>
@@ -9190,7 +9353,7 @@
 </p:sld>
 </file>
 
-<file path=ppt/slides/slide4.xml><?xml version="1.0" encoding="utf-8"?>
+<file path=ppt/slides/slide5.xml><?xml version="1.0" encoding="utf-8"?>
 <p:sld xmlns:a="http://schemas.openxmlformats.org/drawingml/2006/main" xmlns:r="http://schemas.openxmlformats.org/officeDocument/2006/relationships" xmlns:p="http://schemas.openxmlformats.org/presentationml/2006/main" showMasterSp="0">
   <p:cSld>
     <p:spTree>
@@ -9299,7 +9462,7 @@
                 <a:latin typeface="源ノ角ゴシック JP Bold" panose="020B0800000000000000" pitchFamily="34" charset="-128"/>
                 <a:ea typeface="源ノ角ゴシック JP Bold" panose="020B0800000000000000" pitchFamily="34" charset="-128"/>
               </a:rPr>
-              <a:t>M3</a:t>
+              <a:t>M3.2</a:t>
             </a:r>
             <a:r>
               <a:rPr kumimoji="1" lang="ja-JP" altLang="en-US" sz="2000" dirty="0">
@@ -9454,7 +9617,7 @@
           <a:p>
             <a:fld id="{A100B93A-21FB-4666-B0C5-EFD3C8C641C6}" type="slidenum">
               <a:rPr kumimoji="1" lang="ja-JP" altLang="en-US" smtClean="0"/>
-              <a:t>4</a:t>
+              <a:t>5</a:t>
             </a:fld>
             <a:endParaRPr kumimoji="1" lang="ja-JP" altLang="en-US"/>
           </a:p>
@@ -9481,7 +9644,7 @@
 </p:sld>
 </file>
 
-<file path=ppt/slides/slide5.xml><?xml version="1.0" encoding="utf-8"?>
+<file path=ppt/slides/slide6.xml><?xml version="1.0" encoding="utf-8"?>
 <p:sld xmlns:a="http://schemas.openxmlformats.org/drawingml/2006/main" xmlns:r="http://schemas.openxmlformats.org/officeDocument/2006/relationships" xmlns:p="http://schemas.openxmlformats.org/presentationml/2006/main" showMasterSp="0">
   <p:cSld>
     <p:spTree>
@@ -9558,8 +9721,8 @@
         </p:nvSpPr>
         <p:spPr>
           <a:xfrm>
-            <a:off x="2723169" y="1323770"/>
-            <a:ext cx="3843094" cy="400110"/>
+            <a:off x="2200655" y="1558901"/>
+            <a:ext cx="4818454" cy="707886"/>
           </a:xfrm>
           <a:prstGeom prst="rect">
             <a:avLst/>
@@ -9577,34 +9740,82 @@
           <a:lstStyle/>
           <a:p>
             <a:r>
-              <a:rPr kumimoji="1" lang="en-US" altLang="ja-JP" sz="2000" dirty="0">
+              <a:rPr kumimoji="1" lang="ja-JP" altLang="en-US" sz="2000" dirty="0">
                 <a:solidFill>
                   <a:srgbClr val="C00000"/>
                 </a:solidFill>
                 <a:latin typeface="源ノ角ゴシック JP Bold" panose="020B0800000000000000" pitchFamily="34" charset="-128"/>
                 <a:ea typeface="源ノ角ゴシック JP Bold" panose="020B0800000000000000" pitchFamily="34" charset="-128"/>
               </a:rPr>
-              <a:t>M3</a:t>
-            </a:r>
-            <a:r>
-              <a:rPr kumimoji="1" lang="ja-JP" altLang="en-US" sz="2000" dirty="0">
+              <a:t>プッシュリベットで止めます。</a:t>
+            </a:r>
+            <a:endParaRPr kumimoji="1" lang="en-US" altLang="ja-JP" sz="2000" dirty="0">
+              <a:solidFill>
+                <a:srgbClr val="C00000"/>
+              </a:solidFill>
+              <a:latin typeface="源ノ角ゴシック JP Bold" panose="020B0800000000000000" pitchFamily="34" charset="-128"/>
+              <a:ea typeface="源ノ角ゴシック JP Bold" panose="020B0800000000000000" pitchFamily="34" charset="-128"/>
+            </a:endParaRPr>
+          </a:p>
+          <a:p>
+            <a:r>
+              <a:rPr kumimoji="1" lang="en-US" altLang="ja-JP" sz="2000" dirty="0">
                 <a:solidFill>
                   <a:srgbClr val="C00000"/>
                 </a:solidFill>
                 <a:latin typeface="源ノ角ゴシック JP Bold" panose="020B0800000000000000" pitchFamily="34" charset="-128"/>
                 <a:ea typeface="源ノ角ゴシック JP Bold" panose="020B0800000000000000" pitchFamily="34" charset="-128"/>
               </a:rPr>
-              <a:t>のネジは、こんな感じです。</a:t>
-            </a:r>
+              <a:t>3</a:t>
+            </a:r>
+            <a:r>
+              <a:rPr kumimoji="1" lang="ja-JP" altLang="en-US" sz="2000" dirty="0">
+                <a:solidFill>
+                  <a:srgbClr val="C00000"/>
+                </a:solidFill>
+                <a:latin typeface="源ノ角ゴシック JP Bold" panose="020B0800000000000000" pitchFamily="34" charset="-128"/>
+                <a:ea typeface="源ノ角ゴシック JP Bold" panose="020B0800000000000000" pitchFamily="34" charset="-128"/>
+              </a:rPr>
+              <a:t>カ所で十分です。</a:t>
+            </a:r>
+          </a:p>
+        </p:txBody>
+      </p:sp>
+      <p:sp>
+        <p:nvSpPr>
+          <p:cNvPr id="2" name="スライド番号プレースホルダー 1">
+            <a:extLst>
+              <a:ext uri="{FF2B5EF4-FFF2-40B4-BE49-F238E27FC236}">
+                <a16:creationId xmlns:a16="http://schemas.microsoft.com/office/drawing/2014/main" id="{1EF542BB-D301-83D2-AF97-EA6CDF37BC88}"/>
+              </a:ext>
+            </a:extLst>
+          </p:cNvPr>
+          <p:cNvSpPr>
+            <a:spLocks noGrp="1"/>
+          </p:cNvSpPr>
+          <p:nvPr>
+            <p:ph type="sldNum" sz="quarter" idx="12"/>
+          </p:nvPr>
+        </p:nvSpPr>
+        <p:spPr/>
+        <p:txBody>
+          <a:bodyPr/>
+          <a:lstStyle/>
+          <a:p>
+            <a:fld id="{A100B93A-21FB-4666-B0C5-EFD3C8C641C6}" type="slidenum">
+              <a:rPr kumimoji="1" lang="ja-JP" altLang="en-US" smtClean="0"/>
+              <a:t>6</a:t>
+            </a:fld>
+            <a:endParaRPr kumimoji="1" lang="ja-JP" altLang="en-US"/>
           </a:p>
         </p:txBody>
       </p:sp>
       <p:pic>
         <p:nvPicPr>
-          <p:cNvPr id="7" name="図 6">
+          <p:cNvPr id="9" name="図 8">
             <a:extLst>
               <a:ext uri="{FF2B5EF4-FFF2-40B4-BE49-F238E27FC236}">
-                <a16:creationId xmlns:a16="http://schemas.microsoft.com/office/drawing/2014/main" id="{7EF70541-2AB3-AEE1-FD62-365C3D26FF84}"/>
+                <a16:creationId xmlns:a16="http://schemas.microsoft.com/office/drawing/2014/main" id="{E69B6F61-520E-39AD-256E-49E4CF4CF919}"/>
               </a:ext>
             </a:extLst>
           </p:cNvPr>
@@ -9627,285 +9838,20 @@
         </p:blipFill>
         <p:spPr>
           <a:xfrm>
-            <a:off x="2218072" y="1809781"/>
-            <a:ext cx="4718071" cy="3560170"/>
+            <a:off x="339635" y="2430073"/>
+            <a:ext cx="5034517" cy="3936691"/>
           </a:xfrm>
           <a:prstGeom prst="rect">
             <a:avLst/>
           </a:prstGeom>
         </p:spPr>
       </p:pic>
-      <p:sp>
-        <p:nvSpPr>
-          <p:cNvPr id="10" name="テキスト ボックス 9">
+      <p:pic>
+        <p:nvPicPr>
+          <p:cNvPr id="12" name="図 11">
             <a:extLst>
               <a:ext uri="{FF2B5EF4-FFF2-40B4-BE49-F238E27FC236}">
-                <a16:creationId xmlns:a16="http://schemas.microsoft.com/office/drawing/2014/main" id="{EA7F084F-977C-98DA-4253-45FF76D1959C}"/>
-              </a:ext>
-            </a:extLst>
-          </p:cNvPr>
-          <p:cNvSpPr txBox="1"/>
-          <p:nvPr/>
-        </p:nvSpPr>
-        <p:spPr>
-          <a:xfrm>
-            <a:off x="2994582" y="5541753"/>
-            <a:ext cx="3066584" cy="400110"/>
-          </a:xfrm>
-          <a:prstGeom prst="rect">
-            <a:avLst/>
-          </a:prstGeom>
-          <a:solidFill>
-            <a:srgbClr val="FFFFFF">
-              <a:alpha val="50000"/>
-            </a:srgbClr>
-          </a:solidFill>
-        </p:spPr>
-        <p:txBody>
-          <a:bodyPr wrap="square" rtlCol="0">
-            <a:spAutoFit/>
-          </a:bodyPr>
-          <a:lstStyle/>
-          <a:p>
-            <a:r>
-              <a:rPr kumimoji="1" lang="ja-JP" altLang="en-US" sz="2000" dirty="0">
-                <a:solidFill>
-                  <a:srgbClr val="C00000"/>
-                </a:solidFill>
-                <a:latin typeface="源ノ角ゴシック JP Bold" panose="020B0800000000000000" pitchFamily="34" charset="-128"/>
-                <a:ea typeface="源ノ角ゴシック JP Bold" panose="020B0800000000000000" pitchFamily="34" charset="-128"/>
-              </a:rPr>
-              <a:t>本番はナット付けてね。</a:t>
-            </a:r>
-          </a:p>
-        </p:txBody>
-      </p:sp>
-      <p:sp>
-        <p:nvSpPr>
-          <p:cNvPr id="2" name="スライド番号プレースホルダー 1">
-            <a:extLst>
-              <a:ext uri="{FF2B5EF4-FFF2-40B4-BE49-F238E27FC236}">
-                <a16:creationId xmlns:a16="http://schemas.microsoft.com/office/drawing/2014/main" id="{1EF542BB-D301-83D2-AF97-EA6CDF37BC88}"/>
-              </a:ext>
-            </a:extLst>
-          </p:cNvPr>
-          <p:cNvSpPr>
-            <a:spLocks noGrp="1"/>
-          </p:cNvSpPr>
-          <p:nvPr>
-            <p:ph type="sldNum" sz="quarter" idx="12"/>
-          </p:nvPr>
-        </p:nvSpPr>
-        <p:spPr/>
-        <p:txBody>
-          <a:bodyPr/>
-          <a:lstStyle/>
-          <a:p>
-            <a:fld id="{A100B93A-21FB-4666-B0C5-EFD3C8C641C6}" type="slidenum">
-              <a:rPr kumimoji="1" lang="ja-JP" altLang="en-US" smtClean="0"/>
-              <a:t>5</a:t>
-            </a:fld>
-            <a:endParaRPr kumimoji="1" lang="ja-JP" altLang="en-US"/>
-          </a:p>
-        </p:txBody>
-      </p:sp>
-    </p:spTree>
-    <p:extLst>
-      <p:ext uri="{BB962C8B-B14F-4D97-AF65-F5344CB8AC3E}">
-        <p14:creationId xmlns:p14="http://schemas.microsoft.com/office/powerpoint/2010/main" val="3280584461"/>
-      </p:ext>
-    </p:extLst>
-  </p:cSld>
-  <p:clrMapOvr>
-    <a:masterClrMapping/>
-  </p:clrMapOvr>
-  <mc:AlternateContent xmlns:mc="http://schemas.openxmlformats.org/markup-compatibility/2006" xmlns:p14="http://schemas.microsoft.com/office/powerpoint/2010/main">
-    <mc:Choice Requires="p14">
-      <p:transition spd="slow" p14:dur="2000" advTm="2324"/>
-    </mc:Choice>
-    <mc:Fallback xmlns="">
-      <p:transition spd="slow" advTm="2324"/>
-    </mc:Fallback>
-  </mc:AlternateContent>
-</p:sld>
-</file>
-
-<file path=ppt/slides/slide6.xml><?xml version="1.0" encoding="utf-8"?>
-<p:sld xmlns:a="http://schemas.openxmlformats.org/drawingml/2006/main" xmlns:r="http://schemas.openxmlformats.org/officeDocument/2006/relationships" xmlns:p="http://schemas.openxmlformats.org/presentationml/2006/main" showMasterSp="0">
-  <p:cSld>
-    <p:spTree>
-      <p:nvGrpSpPr>
-        <p:cNvPr id="1" name="">
-          <a:extLst>
-            <a:ext uri="{FF2B5EF4-FFF2-40B4-BE49-F238E27FC236}">
-              <a16:creationId xmlns:a16="http://schemas.microsoft.com/office/drawing/2014/main" id="{522C7761-2B70-A6A4-7577-AFEDEFA962FE}"/>
-            </a:ext>
-          </a:extLst>
-        </p:cNvPr>
-        <p:cNvGrpSpPr/>
-        <p:nvPr/>
-      </p:nvGrpSpPr>
-      <p:grpSpPr>
-        <a:xfrm>
-          <a:off x="0" y="0"/>
-          <a:ext cx="0" cy="0"/>
-          <a:chOff x="0" y="0"/>
-          <a:chExt cx="0" cy="0"/>
-        </a:xfrm>
-      </p:grpSpPr>
-      <p:pic>
-        <p:nvPicPr>
-          <p:cNvPr id="9" name="図 8">
-            <a:extLst>
-              <a:ext uri="{FF2B5EF4-FFF2-40B4-BE49-F238E27FC236}">
-                <a16:creationId xmlns:a16="http://schemas.microsoft.com/office/drawing/2014/main" id="{ADCF6D75-FC0E-4247-9FFF-670D49B9E7F5}"/>
-              </a:ext>
-            </a:extLst>
-          </p:cNvPr>
-          <p:cNvPicPr>
-            <a:picLocks noChangeAspect="1"/>
-          </p:cNvPicPr>
-          <p:nvPr/>
-        </p:nvPicPr>
-        <p:blipFill>
-          <a:blip r:embed="rId3" cstate="screen">
-            <a:extLst>
-              <a:ext uri="{28A0092B-C50C-407E-A947-70E740481C1C}">
-                <a14:useLocalDpi xmlns:a14="http://schemas.microsoft.com/office/drawing/2010/main"/>
-              </a:ext>
-            </a:extLst>
-          </a:blip>
-          <a:stretch>
-            <a:fillRect/>
-          </a:stretch>
-        </p:blipFill>
-        <p:spPr>
-          <a:xfrm>
-            <a:off x="858253" y="1489165"/>
-            <a:ext cx="2777166" cy="5220787"/>
-          </a:xfrm>
-          <a:prstGeom prst="rect">
-            <a:avLst/>
-          </a:prstGeom>
-        </p:spPr>
-      </p:pic>
-      <p:sp>
-        <p:nvSpPr>
-          <p:cNvPr id="6" name="テキスト ボックス 5">
-            <a:extLst>
-              <a:ext uri="{FF2B5EF4-FFF2-40B4-BE49-F238E27FC236}">
-                <a16:creationId xmlns:a16="http://schemas.microsoft.com/office/drawing/2014/main" id="{0A51BD5E-1FF7-5A01-8E49-12E759D8E7A5}"/>
-              </a:ext>
-            </a:extLst>
-          </p:cNvPr>
-          <p:cNvSpPr txBox="1"/>
-          <p:nvPr/>
-        </p:nvSpPr>
-        <p:spPr>
-          <a:xfrm>
-            <a:off x="1714423" y="317440"/>
-            <a:ext cx="5715153" cy="584775"/>
-          </a:xfrm>
-          <a:prstGeom prst="rect">
-            <a:avLst/>
-          </a:prstGeom>
-          <a:solidFill>
-            <a:srgbClr val="FFFFFF">
-              <a:alpha val="50000"/>
-            </a:srgbClr>
-          </a:solidFill>
-        </p:spPr>
-        <p:txBody>
-          <a:bodyPr wrap="square" rtlCol="0">
-            <a:spAutoFit/>
-          </a:bodyPr>
-          <a:lstStyle/>
-          <a:p>
-            <a:pPr algn="ctr"/>
-            <a:r>
-              <a:rPr kumimoji="1" lang="ja-JP" altLang="en-US" sz="3200" dirty="0">
-                <a:solidFill>
-                  <a:srgbClr val="C00000"/>
-                </a:solidFill>
-                <a:latin typeface="源ノ角ゴシック JP Bold" panose="020B0800000000000000" pitchFamily="34" charset="-128"/>
-                <a:ea typeface="源ノ角ゴシック JP Bold" panose="020B0800000000000000" pitchFamily="34" charset="-128"/>
-              </a:rPr>
-              <a:t>ペットボトル缶サット</a:t>
-            </a:r>
-          </a:p>
-        </p:txBody>
-      </p:sp>
-      <p:sp>
-        <p:nvSpPr>
-          <p:cNvPr id="3" name="テキスト ボックス 2">
-            <a:extLst>
-              <a:ext uri="{FF2B5EF4-FFF2-40B4-BE49-F238E27FC236}">
-                <a16:creationId xmlns:a16="http://schemas.microsoft.com/office/drawing/2014/main" id="{76D61BA2-6283-56FF-5797-6CFA0099B920}"/>
-              </a:ext>
-            </a:extLst>
-          </p:cNvPr>
-          <p:cNvSpPr txBox="1"/>
-          <p:nvPr/>
-        </p:nvSpPr>
-        <p:spPr>
-          <a:xfrm>
-            <a:off x="606500" y="1023138"/>
-            <a:ext cx="3717196" cy="400110"/>
-          </a:xfrm>
-          <a:prstGeom prst="rect">
-            <a:avLst/>
-          </a:prstGeom>
-          <a:solidFill>
-            <a:srgbClr val="FFFFFF">
-              <a:alpha val="50000"/>
-            </a:srgbClr>
-          </a:solidFill>
-        </p:spPr>
-        <p:txBody>
-          <a:bodyPr wrap="square" rtlCol="0">
-            <a:spAutoFit/>
-          </a:bodyPr>
-          <a:lstStyle/>
-          <a:p>
-            <a:r>
-              <a:rPr kumimoji="1" lang="ja-JP" altLang="en-US" sz="2000" dirty="0">
-                <a:solidFill>
-                  <a:srgbClr val="C00000"/>
-                </a:solidFill>
-                <a:latin typeface="源ノ角ゴシック JP Bold" panose="020B0800000000000000" pitchFamily="34" charset="-128"/>
-                <a:ea typeface="源ノ角ゴシック JP Bold" panose="020B0800000000000000" pitchFamily="34" charset="-128"/>
-              </a:rPr>
-              <a:t>基板を固定、</a:t>
-            </a:r>
-            <a:r>
-              <a:rPr kumimoji="1" lang="en-US" altLang="ja-JP" sz="2000" dirty="0">
-                <a:solidFill>
-                  <a:srgbClr val="C00000"/>
-                </a:solidFill>
-                <a:latin typeface="源ノ角ゴシック JP Bold" panose="020B0800000000000000" pitchFamily="34" charset="-128"/>
-                <a:ea typeface="源ノ角ゴシック JP Bold" panose="020B0800000000000000" pitchFamily="34" charset="-128"/>
-              </a:rPr>
-              <a:t>IMU PRO</a:t>
-            </a:r>
-            <a:r>
-              <a:rPr kumimoji="1" lang="ja-JP" altLang="en-US" sz="2000" dirty="0">
-                <a:solidFill>
-                  <a:srgbClr val="C00000"/>
-                </a:solidFill>
-                <a:latin typeface="源ノ角ゴシック JP Bold" panose="020B0800000000000000" pitchFamily="34" charset="-128"/>
-                <a:ea typeface="源ノ角ゴシック JP Bold" panose="020B0800000000000000" pitchFamily="34" charset="-128"/>
-              </a:rPr>
-              <a:t>も固定</a:t>
-            </a:r>
-          </a:p>
-        </p:txBody>
-      </p:sp>
-      <p:pic>
-        <p:nvPicPr>
-          <p:cNvPr id="4" name="図 3">
-            <a:extLst>
-              <a:ext uri="{FF2B5EF4-FFF2-40B4-BE49-F238E27FC236}">
-                <a16:creationId xmlns:a16="http://schemas.microsoft.com/office/drawing/2014/main" id="{6F9B3C5D-1FE7-BE2F-10A5-2F1756707127}"/>
+                <a16:creationId xmlns:a16="http://schemas.microsoft.com/office/drawing/2014/main" id="{0DA25E0C-DE62-F89C-9BEF-8F98931CDB3E}"/>
               </a:ext>
             </a:extLst>
           </p:cNvPr>
@@ -9928,92 +9874,18 @@
         </p:blipFill>
         <p:spPr>
           <a:xfrm>
-            <a:off x="5011973" y="2159724"/>
-            <a:ext cx="3268321" cy="4550229"/>
+            <a:off x="5706994" y="2430073"/>
+            <a:ext cx="2958035" cy="3964115"/>
           </a:xfrm>
           <a:prstGeom prst="rect">
             <a:avLst/>
           </a:prstGeom>
         </p:spPr>
       </p:pic>
-      <p:sp>
-        <p:nvSpPr>
-          <p:cNvPr id="5" name="テキスト ボックス 4">
-            <a:extLst>
-              <a:ext uri="{FF2B5EF4-FFF2-40B4-BE49-F238E27FC236}">
-                <a16:creationId xmlns:a16="http://schemas.microsoft.com/office/drawing/2014/main" id="{56FEAD4C-6D13-A8BC-FD19-9026D5DFCDA3}"/>
-              </a:ext>
-            </a:extLst>
-          </p:cNvPr>
-          <p:cNvSpPr txBox="1"/>
-          <p:nvPr/>
-        </p:nvSpPr>
-        <p:spPr>
-          <a:xfrm>
-            <a:off x="5748060" y="1628385"/>
-            <a:ext cx="1796145" cy="400110"/>
-          </a:xfrm>
-          <a:prstGeom prst="rect">
-            <a:avLst/>
-          </a:prstGeom>
-          <a:solidFill>
-            <a:srgbClr val="FFFFFF">
-              <a:alpha val="50000"/>
-            </a:srgbClr>
-          </a:solidFill>
-        </p:spPr>
-        <p:txBody>
-          <a:bodyPr wrap="square" rtlCol="0">
-            <a:spAutoFit/>
-          </a:bodyPr>
-          <a:lstStyle/>
-          <a:p>
-            <a:r>
-              <a:rPr kumimoji="1" lang="ja-JP" altLang="en-US" sz="2000" dirty="0">
-                <a:solidFill>
-                  <a:srgbClr val="C00000"/>
-                </a:solidFill>
-                <a:latin typeface="源ノ角ゴシック JP Bold" panose="020B0800000000000000" pitchFamily="34" charset="-128"/>
-                <a:ea typeface="源ノ角ゴシック JP Bold" panose="020B0800000000000000" pitchFamily="34" charset="-128"/>
-              </a:rPr>
-              <a:t>カメラも固定</a:t>
-            </a:r>
-          </a:p>
-        </p:txBody>
-      </p:sp>
-      <p:sp>
-        <p:nvSpPr>
-          <p:cNvPr id="2" name="スライド番号プレースホルダー 1">
-            <a:extLst>
-              <a:ext uri="{FF2B5EF4-FFF2-40B4-BE49-F238E27FC236}">
-                <a16:creationId xmlns:a16="http://schemas.microsoft.com/office/drawing/2014/main" id="{111153FF-D2DC-9295-292F-B9C8DCC37C86}"/>
-              </a:ext>
-            </a:extLst>
-          </p:cNvPr>
-          <p:cNvSpPr>
-            <a:spLocks noGrp="1"/>
-          </p:cNvSpPr>
-          <p:nvPr>
-            <p:ph type="sldNum" sz="quarter" idx="12"/>
-          </p:nvPr>
-        </p:nvSpPr>
-        <p:spPr/>
-        <p:txBody>
-          <a:bodyPr/>
-          <a:lstStyle/>
-          <a:p>
-            <a:fld id="{A100B93A-21FB-4666-B0C5-EFD3C8C641C6}" type="slidenum">
-              <a:rPr kumimoji="1" lang="ja-JP" altLang="en-US" smtClean="0"/>
-              <a:t>6</a:t>
-            </a:fld>
-            <a:endParaRPr kumimoji="1" lang="ja-JP" altLang="en-US"/>
-          </a:p>
-        </p:txBody>
-      </p:sp>
     </p:spTree>
     <p:extLst>
       <p:ext uri="{BB962C8B-B14F-4D97-AF65-F5344CB8AC3E}">
-        <p14:creationId xmlns:p14="http://schemas.microsoft.com/office/powerpoint/2010/main" val="4059067911"/>
+        <p14:creationId xmlns:p14="http://schemas.microsoft.com/office/powerpoint/2010/main" val="3280584461"/>
       </p:ext>
     </p:extLst>
   </p:cSld>
@@ -10039,7 +9911,7 @@
         <p:cNvPr id="1" name="">
           <a:extLst>
             <a:ext uri="{FF2B5EF4-FFF2-40B4-BE49-F238E27FC236}">
-              <a16:creationId xmlns:a16="http://schemas.microsoft.com/office/drawing/2014/main" id="{D17ED9B1-D803-A0F5-E97E-7318DB0A4B97}"/>
+              <a16:creationId xmlns:a16="http://schemas.microsoft.com/office/drawing/2014/main" id="{4AE009A3-8BE4-69EF-0C43-9DC6DC9B1715}"/>
             </a:ext>
           </a:extLst>
         </p:cNvPr>
@@ -10059,7 +9931,7 @@
           <p:cNvPr id="6" name="テキスト ボックス 5">
             <a:extLst>
               <a:ext uri="{FF2B5EF4-FFF2-40B4-BE49-F238E27FC236}">
-                <a16:creationId xmlns:a16="http://schemas.microsoft.com/office/drawing/2014/main" id="{ACA5DD04-51C4-F1AB-52F5-008342476C62}"/>
+                <a16:creationId xmlns:a16="http://schemas.microsoft.com/office/drawing/2014/main" id="{E11F7101-834E-C8A1-F9A8-E654819561FE}"/>
               </a:ext>
             </a:extLst>
           </p:cNvPr>
@@ -10105,7 +9977,7 @@
           <p:cNvPr id="3" name="テキスト ボックス 2">
             <a:extLst>
               <a:ext uri="{FF2B5EF4-FFF2-40B4-BE49-F238E27FC236}">
-                <a16:creationId xmlns:a16="http://schemas.microsoft.com/office/drawing/2014/main" id="{4BA274A3-3AB7-18A8-7CAC-5E512A8520A8}"/>
+                <a16:creationId xmlns:a16="http://schemas.microsoft.com/office/drawing/2014/main" id="{B27D1DA2-E1F0-E2CE-BC38-5ABBA0277000}"/>
               </a:ext>
             </a:extLst>
           </p:cNvPr>
@@ -10114,8 +9986,8 @@
         </p:nvSpPr>
         <p:spPr>
           <a:xfrm>
-            <a:off x="281454" y="2307771"/>
-            <a:ext cx="2865936" cy="400110"/>
+            <a:off x="3907049" y="1065245"/>
+            <a:ext cx="2267329" cy="400110"/>
           </a:xfrm>
           <a:prstGeom prst="rect">
             <a:avLst/>
@@ -10140,62 +10012,46 @@
                 <a:latin typeface="源ノ角ゴシック JP Bold" panose="020B0800000000000000" pitchFamily="34" charset="-128"/>
                 <a:ea typeface="源ノ角ゴシック JP Bold" panose="020B0800000000000000" pitchFamily="34" charset="-128"/>
               </a:rPr>
-              <a:t>カメラは地上に向けて</a:t>
-            </a:r>
-          </a:p>
-        </p:txBody>
-      </p:sp>
-      <p:sp>
-        <p:nvSpPr>
-          <p:cNvPr id="5" name="テキスト ボックス 4">
+              <a:t>基板を固定</a:t>
+            </a:r>
+          </a:p>
+        </p:txBody>
+      </p:sp>
+      <p:sp>
+        <p:nvSpPr>
+          <p:cNvPr id="2" name="スライド番号プレースホルダー 1">
             <a:extLst>
               <a:ext uri="{FF2B5EF4-FFF2-40B4-BE49-F238E27FC236}">
-                <a16:creationId xmlns:a16="http://schemas.microsoft.com/office/drawing/2014/main" id="{B085EAE9-9155-D52A-1A76-273D80C8BEEE}"/>
+                <a16:creationId xmlns:a16="http://schemas.microsoft.com/office/drawing/2014/main" id="{8914576F-F9CD-9CC2-E95C-D46CD64C2F42}"/>
               </a:ext>
             </a:extLst>
           </p:cNvPr>
-          <p:cNvSpPr txBox="1"/>
-          <p:nvPr/>
-        </p:nvSpPr>
-        <p:spPr>
-          <a:xfrm>
-            <a:off x="3696470" y="1404938"/>
-            <a:ext cx="1903142" cy="400110"/>
-          </a:xfrm>
-          <a:prstGeom prst="rect">
-            <a:avLst/>
-          </a:prstGeom>
-          <a:solidFill>
-            <a:srgbClr val="FFFFFF">
-              <a:alpha val="50000"/>
-            </a:srgbClr>
-          </a:solidFill>
-        </p:spPr>
-        <p:txBody>
-          <a:bodyPr wrap="square" rtlCol="0">
-            <a:spAutoFit/>
-          </a:bodyPr>
-          <a:lstStyle/>
-          <a:p>
-            <a:r>
-              <a:rPr kumimoji="1" lang="ja-JP" altLang="en-US" sz="2000" dirty="0">
-                <a:solidFill>
-                  <a:srgbClr val="C00000"/>
-                </a:solidFill>
-                <a:latin typeface="源ノ角ゴシック JP Bold" panose="020B0800000000000000" pitchFamily="34" charset="-128"/>
-                <a:ea typeface="源ノ角ゴシック JP Bold" panose="020B0800000000000000" pitchFamily="34" charset="-128"/>
-              </a:rPr>
-              <a:t>ざっくり固定</a:t>
-            </a:r>
+          <p:cNvSpPr>
+            <a:spLocks noGrp="1"/>
+          </p:cNvSpPr>
+          <p:nvPr>
+            <p:ph type="sldNum" sz="quarter" idx="12"/>
+          </p:nvPr>
+        </p:nvSpPr>
+        <p:spPr/>
+        <p:txBody>
+          <a:bodyPr/>
+          <a:lstStyle/>
+          <a:p>
+            <a:fld id="{A100B93A-21FB-4666-B0C5-EFD3C8C641C6}" type="slidenum">
+              <a:rPr kumimoji="1" lang="ja-JP" altLang="en-US" smtClean="0"/>
+              <a:t>7</a:t>
+            </a:fld>
+            <a:endParaRPr kumimoji="1" lang="ja-JP" altLang="en-US"/>
           </a:p>
         </p:txBody>
       </p:sp>
       <p:pic>
         <p:nvPicPr>
-          <p:cNvPr id="7" name="図 6">
+          <p:cNvPr id="8" name="図 7">
             <a:extLst>
               <a:ext uri="{FF2B5EF4-FFF2-40B4-BE49-F238E27FC236}">
-                <a16:creationId xmlns:a16="http://schemas.microsoft.com/office/drawing/2014/main" id="{AA767B47-A917-B09B-B429-E204F191F0DB}"/>
+                <a16:creationId xmlns:a16="http://schemas.microsoft.com/office/drawing/2014/main" id="{B4D4174C-1178-33B4-6848-63DCA595E9AC}"/>
               </a:ext>
             </a:extLst>
           </p:cNvPr>
@@ -10218,8 +10074,8 @@
         </p:blipFill>
         <p:spPr>
           <a:xfrm>
-            <a:off x="364843" y="2793995"/>
-            <a:ext cx="2699159" cy="2542905"/>
+            <a:off x="184579" y="1628386"/>
+            <a:ext cx="4157679" cy="4036688"/>
           </a:xfrm>
           <a:prstGeom prst="rect">
             <a:avLst/>
@@ -10228,10 +10084,10 @@
       </p:pic>
       <p:pic>
         <p:nvPicPr>
-          <p:cNvPr id="10" name="図 9">
+          <p:cNvPr id="7" name="図 6">
             <a:extLst>
               <a:ext uri="{FF2B5EF4-FFF2-40B4-BE49-F238E27FC236}">
-                <a16:creationId xmlns:a16="http://schemas.microsoft.com/office/drawing/2014/main" id="{AD438B8E-FC71-EC96-835F-AF664F7C176A}"/>
+                <a16:creationId xmlns:a16="http://schemas.microsoft.com/office/drawing/2014/main" id="{CAF47439-1EE1-96B9-E86E-90F9B00E11AE}"/>
               </a:ext>
             </a:extLst>
           </p:cNvPr>
@@ -10254,139 +10110,29 @@
         </p:blipFill>
         <p:spPr>
           <a:xfrm>
-            <a:off x="3320546" y="1864355"/>
-            <a:ext cx="2502905" cy="4402183"/>
+            <a:off x="4571999" y="1854807"/>
+            <a:ext cx="4387422" cy="3437105"/>
           </a:xfrm>
           <a:prstGeom prst="rect">
             <a:avLst/>
           </a:prstGeom>
         </p:spPr>
       </p:pic>
-      <p:pic>
-        <p:nvPicPr>
-          <p:cNvPr id="11" name="図 10">
-            <a:extLst>
-              <a:ext uri="{FF2B5EF4-FFF2-40B4-BE49-F238E27FC236}">
-                <a16:creationId xmlns:a16="http://schemas.microsoft.com/office/drawing/2014/main" id="{1D288976-5923-E9E2-EA61-D04C7DC8D705}"/>
-              </a:ext>
-            </a:extLst>
-          </p:cNvPr>
-          <p:cNvPicPr>
-            <a:picLocks noChangeAspect="1"/>
-          </p:cNvPicPr>
-          <p:nvPr/>
-        </p:nvPicPr>
-        <p:blipFill>
-          <a:blip r:embed="rId5" cstate="screen">
-            <a:extLst>
-              <a:ext uri="{28A0092B-C50C-407E-A947-70E740481C1C}">
-                <a14:useLocalDpi xmlns:a14="http://schemas.microsoft.com/office/drawing/2010/main"/>
-              </a:ext>
-            </a:extLst>
-          </a:blip>
-          <a:stretch>
-            <a:fillRect/>
-          </a:stretch>
-        </p:blipFill>
-        <p:spPr>
-          <a:xfrm>
-            <a:off x="6350535" y="1698410"/>
-            <a:ext cx="2158077" cy="4611670"/>
-          </a:xfrm>
-          <a:prstGeom prst="rect">
-            <a:avLst/>
-          </a:prstGeom>
-        </p:spPr>
-      </p:pic>
-      <p:sp>
-        <p:nvSpPr>
-          <p:cNvPr id="12" name="テキスト ボックス 11">
-            <a:extLst>
-              <a:ext uri="{FF2B5EF4-FFF2-40B4-BE49-F238E27FC236}">
-                <a16:creationId xmlns:a16="http://schemas.microsoft.com/office/drawing/2014/main" id="{C257C446-B8E8-3B9A-D90D-4D9778889EA2}"/>
-              </a:ext>
-            </a:extLst>
-          </p:cNvPr>
-          <p:cNvSpPr txBox="1"/>
-          <p:nvPr/>
-        </p:nvSpPr>
-        <p:spPr>
-          <a:xfrm>
-            <a:off x="6915182" y="1254758"/>
-            <a:ext cx="1028785" cy="400110"/>
-          </a:xfrm>
-          <a:prstGeom prst="rect">
-            <a:avLst/>
-          </a:prstGeom>
-          <a:solidFill>
-            <a:srgbClr val="FFFFFF">
-              <a:alpha val="50000"/>
-            </a:srgbClr>
-          </a:solidFill>
-        </p:spPr>
-        <p:txBody>
-          <a:bodyPr wrap="square" rtlCol="0">
-            <a:spAutoFit/>
-          </a:bodyPr>
-          <a:lstStyle/>
-          <a:p>
-            <a:r>
-              <a:rPr kumimoji="1" lang="ja-JP" altLang="en-US" sz="2000" dirty="0">
-                <a:solidFill>
-                  <a:srgbClr val="C00000"/>
-                </a:solidFill>
-                <a:latin typeface="源ノ角ゴシック JP Bold" panose="020B0800000000000000" pitchFamily="34" charset="-128"/>
-                <a:ea typeface="源ノ角ゴシック JP Bold" panose="020B0800000000000000" pitchFamily="34" charset="-128"/>
-              </a:rPr>
-              <a:t>入った</a:t>
-            </a:r>
-          </a:p>
-        </p:txBody>
-      </p:sp>
-      <p:sp>
-        <p:nvSpPr>
-          <p:cNvPr id="2" name="スライド番号プレースホルダー 1">
-            <a:extLst>
-              <a:ext uri="{FF2B5EF4-FFF2-40B4-BE49-F238E27FC236}">
-                <a16:creationId xmlns:a16="http://schemas.microsoft.com/office/drawing/2014/main" id="{47F74D4E-01EA-1C09-1B5D-A96327D80991}"/>
-              </a:ext>
-            </a:extLst>
-          </p:cNvPr>
-          <p:cNvSpPr>
-            <a:spLocks noGrp="1"/>
-          </p:cNvSpPr>
-          <p:nvPr>
-            <p:ph type="sldNum" sz="quarter" idx="12"/>
-          </p:nvPr>
-        </p:nvSpPr>
-        <p:spPr/>
-        <p:txBody>
-          <a:bodyPr/>
-          <a:lstStyle/>
-          <a:p>
-            <a:fld id="{A100B93A-21FB-4666-B0C5-EFD3C8C641C6}" type="slidenum">
-              <a:rPr kumimoji="1" lang="ja-JP" altLang="en-US" smtClean="0"/>
-              <a:t>7</a:t>
-            </a:fld>
-            <a:endParaRPr kumimoji="1" lang="ja-JP" altLang="en-US"/>
-          </a:p>
-        </p:txBody>
-      </p:sp>
     </p:spTree>
     <p:extLst>
       <p:ext uri="{BB962C8B-B14F-4D97-AF65-F5344CB8AC3E}">
-        <p14:creationId xmlns:p14="http://schemas.microsoft.com/office/powerpoint/2010/main" val="1641613236"/>
+        <p14:creationId xmlns:p14="http://schemas.microsoft.com/office/powerpoint/2010/main" val="3677759465"/>
       </p:ext>
     </p:extLst>
   </p:cSld>
   <p:clrMapOvr>
     <a:masterClrMapping/>
   </p:clrMapOvr>
-  <mc:AlternateContent xmlns:mc="http://schemas.openxmlformats.org/markup-compatibility/2006" xmlns:p14="http://schemas.microsoft.com/office/powerpoint/2010/main">
-    <mc:Choice Requires="p14">
+  <mc:AlternateContent xmlns:mc="http://schemas.openxmlformats.org/markup-compatibility/2006">
+    <mc:Choice xmlns:p14="http://schemas.microsoft.com/office/powerpoint/2010/main" Requires="p14">
       <p:transition spd="slow" p14:dur="2000" advTm="2324"/>
     </mc:Choice>
-    <mc:Fallback xmlns="">
+    <mc:Fallback>
       <p:transition spd="slow" advTm="2324"/>
     </mc:Fallback>
   </mc:AlternateContent>
@@ -10401,7 +10147,7 @@
         <p:cNvPr id="1" name="">
           <a:extLst>
             <a:ext uri="{FF2B5EF4-FFF2-40B4-BE49-F238E27FC236}">
-              <a16:creationId xmlns:a16="http://schemas.microsoft.com/office/drawing/2014/main" id="{28A1F688-8EDF-2F4B-595D-DEC00EC682CE}"/>
+              <a16:creationId xmlns:a16="http://schemas.microsoft.com/office/drawing/2014/main" id="{4BACA99B-DE7E-1140-D6EC-CA1A6BB16D4E}"/>
             </a:ext>
           </a:extLst>
         </p:cNvPr>
@@ -10421,7 +10167,7 @@
           <p:cNvPr id="6" name="テキスト ボックス 5">
             <a:extLst>
               <a:ext uri="{FF2B5EF4-FFF2-40B4-BE49-F238E27FC236}">
-                <a16:creationId xmlns:a16="http://schemas.microsoft.com/office/drawing/2014/main" id="{43EA5655-9748-7DB0-5DD1-48088F826EB1}"/>
+                <a16:creationId xmlns:a16="http://schemas.microsoft.com/office/drawing/2014/main" id="{BADA6B17-4A19-4A84-1939-D75D4D3E1241}"/>
               </a:ext>
             </a:extLst>
           </p:cNvPr>
@@ -10467,7 +10213,7 @@
           <p:cNvPr id="3" name="テキスト ボックス 2">
             <a:extLst>
               <a:ext uri="{FF2B5EF4-FFF2-40B4-BE49-F238E27FC236}">
-                <a16:creationId xmlns:a16="http://schemas.microsoft.com/office/drawing/2014/main" id="{C2B60FC3-8DC2-513D-A7C2-7EF3C1F7C740}"/>
+                <a16:creationId xmlns:a16="http://schemas.microsoft.com/office/drawing/2014/main" id="{0F5F1A2F-E9E8-F6A1-206C-7760D9A16D76}"/>
               </a:ext>
             </a:extLst>
           </p:cNvPr>
@@ -10476,8 +10222,8 @@
         </p:nvSpPr>
         <p:spPr>
           <a:xfrm>
-            <a:off x="619039" y="1498357"/>
-            <a:ext cx="3523721" cy="400110"/>
+            <a:off x="3438334" y="1335013"/>
+            <a:ext cx="2267329" cy="400110"/>
           </a:xfrm>
           <a:prstGeom prst="rect">
             <a:avLst/>
@@ -10502,62 +10248,73 @@
                 <a:latin typeface="源ノ角ゴシック JP Bold" panose="020B0800000000000000" pitchFamily="34" charset="-128"/>
                 <a:ea typeface="源ノ角ゴシック JP Bold" panose="020B0800000000000000" pitchFamily="34" charset="-128"/>
               </a:rPr>
-              <a:t>パラシュートの固定穴空け</a:t>
-            </a:r>
-          </a:p>
-        </p:txBody>
-      </p:sp>
-      <p:sp>
-        <p:nvSpPr>
-          <p:cNvPr id="5" name="テキスト ボックス 4">
+              <a:t>電源も</a:t>
+            </a:r>
+            <a:r>
+              <a:rPr kumimoji="1" lang="en-US" altLang="ja-JP" sz="2000" dirty="0">
+                <a:solidFill>
+                  <a:srgbClr val="C00000"/>
+                </a:solidFill>
+                <a:latin typeface="源ノ角ゴシック JP Bold" panose="020B0800000000000000" pitchFamily="34" charset="-128"/>
+                <a:ea typeface="源ノ角ゴシック JP Bold" panose="020B0800000000000000" pitchFamily="34" charset="-128"/>
+              </a:rPr>
+              <a:t>OK</a:t>
+            </a:r>
+            <a:r>
+              <a:rPr kumimoji="1" lang="ja-JP" altLang="en-US" sz="2000" dirty="0">
+                <a:solidFill>
+                  <a:srgbClr val="C00000"/>
+                </a:solidFill>
+                <a:latin typeface="源ノ角ゴシック JP Bold" panose="020B0800000000000000" pitchFamily="34" charset="-128"/>
+                <a:ea typeface="源ノ角ゴシック JP Bold" panose="020B0800000000000000" pitchFamily="34" charset="-128"/>
+              </a:rPr>
+              <a:t>です。</a:t>
+            </a:r>
+            <a:endParaRPr kumimoji="1" lang="en-US" altLang="ja-JP" sz="2000" dirty="0">
+              <a:solidFill>
+                <a:srgbClr val="C00000"/>
+              </a:solidFill>
+              <a:latin typeface="源ノ角ゴシック JP Bold" panose="020B0800000000000000" pitchFamily="34" charset="-128"/>
+              <a:ea typeface="源ノ角ゴシック JP Bold" panose="020B0800000000000000" pitchFamily="34" charset="-128"/>
+            </a:endParaRPr>
+          </a:p>
+        </p:txBody>
+      </p:sp>
+      <p:sp>
+        <p:nvSpPr>
+          <p:cNvPr id="2" name="スライド番号プレースホルダー 1">
             <a:extLst>
               <a:ext uri="{FF2B5EF4-FFF2-40B4-BE49-F238E27FC236}">
-                <a16:creationId xmlns:a16="http://schemas.microsoft.com/office/drawing/2014/main" id="{3465252A-258C-0B1B-79A9-830F73DE675D}"/>
+                <a16:creationId xmlns:a16="http://schemas.microsoft.com/office/drawing/2014/main" id="{95556A79-82A6-05F9-A389-AF766DF3EF29}"/>
               </a:ext>
             </a:extLst>
           </p:cNvPr>
-          <p:cNvSpPr txBox="1"/>
-          <p:nvPr/>
-        </p:nvSpPr>
-        <p:spPr>
-          <a:xfrm>
-            <a:off x="4475474" y="1498357"/>
-            <a:ext cx="4049487" cy="400110"/>
-          </a:xfrm>
-          <a:prstGeom prst="rect">
-            <a:avLst/>
-          </a:prstGeom>
-          <a:solidFill>
-            <a:srgbClr val="FFFFFF">
-              <a:alpha val="50000"/>
-            </a:srgbClr>
-          </a:solidFill>
-        </p:spPr>
-        <p:txBody>
-          <a:bodyPr wrap="square" rtlCol="0">
-            <a:spAutoFit/>
-          </a:bodyPr>
-          <a:lstStyle/>
-          <a:p>
-            <a:r>
-              <a:rPr kumimoji="1" lang="ja-JP" altLang="en-US" sz="2000" dirty="0">
-                <a:solidFill>
-                  <a:srgbClr val="C00000"/>
-                </a:solidFill>
-                <a:latin typeface="源ノ角ゴシック JP Bold" panose="020B0800000000000000" pitchFamily="34" charset="-128"/>
-                <a:ea typeface="源ノ角ゴシック JP Bold" panose="020B0800000000000000" pitchFamily="34" charset="-128"/>
-              </a:rPr>
-              <a:t>タミヤのプッシュリベットで固定</a:t>
-            </a:r>
+          <p:cNvSpPr>
+            <a:spLocks noGrp="1"/>
+          </p:cNvSpPr>
+          <p:nvPr>
+            <p:ph type="sldNum" sz="quarter" idx="12"/>
+          </p:nvPr>
+        </p:nvSpPr>
+        <p:spPr/>
+        <p:txBody>
+          <a:bodyPr/>
+          <a:lstStyle/>
+          <a:p>
+            <a:fld id="{A100B93A-21FB-4666-B0C5-EFD3C8C641C6}" type="slidenum">
+              <a:rPr kumimoji="1" lang="ja-JP" altLang="en-US" smtClean="0"/>
+              <a:t>8</a:t>
+            </a:fld>
+            <a:endParaRPr kumimoji="1" lang="ja-JP" altLang="en-US"/>
           </a:p>
         </p:txBody>
       </p:sp>
       <p:pic>
         <p:nvPicPr>
-          <p:cNvPr id="4" name="図 3">
+          <p:cNvPr id="5" name="図 4">
             <a:extLst>
               <a:ext uri="{FF2B5EF4-FFF2-40B4-BE49-F238E27FC236}">
-                <a16:creationId xmlns:a16="http://schemas.microsoft.com/office/drawing/2014/main" id="{FC74BB8B-2B05-777A-A133-472C5D141C29}"/>
+                <a16:creationId xmlns:a16="http://schemas.microsoft.com/office/drawing/2014/main" id="{98326217-798F-27CD-08E6-9272B3C4DBE6}"/>
               </a:ext>
             </a:extLst>
           </p:cNvPr>
@@ -10580,8 +10337,8 @@
         </p:blipFill>
         <p:spPr>
           <a:xfrm>
-            <a:off x="340398" y="1991886"/>
-            <a:ext cx="3566396" cy="4550229"/>
+            <a:off x="4414818" y="2342604"/>
+            <a:ext cx="4276335" cy="3180383"/>
           </a:xfrm>
           <a:prstGeom prst="rect">
             <a:avLst/>
@@ -10590,10 +10347,276 @@
       </p:pic>
       <p:pic>
         <p:nvPicPr>
-          <p:cNvPr id="9" name="図 8">
+          <p:cNvPr id="10" name="図 9">
             <a:extLst>
               <a:ext uri="{FF2B5EF4-FFF2-40B4-BE49-F238E27FC236}">
-                <a16:creationId xmlns:a16="http://schemas.microsoft.com/office/drawing/2014/main" id="{F10C70E9-B856-1FC9-337B-75E44ED242CA}"/>
+                <a16:creationId xmlns:a16="http://schemas.microsoft.com/office/drawing/2014/main" id="{F2415EAA-C731-D865-829E-15D30BC16F36}"/>
+              </a:ext>
+            </a:extLst>
+          </p:cNvPr>
+          <p:cNvPicPr>
+            <a:picLocks noChangeAspect="1"/>
+          </p:cNvPicPr>
+          <p:nvPr/>
+        </p:nvPicPr>
+        <p:blipFill>
+          <a:blip r:embed="rId4" cstate="screen">
+            <a:extLst>
+              <a:ext uri="{28A0092B-C50C-407E-A947-70E740481C1C}">
+                <a14:useLocalDpi xmlns:a14="http://schemas.microsoft.com/office/drawing/2010/main"/>
+              </a:ext>
+            </a:extLst>
+          </a:blip>
+          <a:srcRect/>
+          <a:stretch/>
+        </p:blipFill>
+        <p:spPr>
+          <a:xfrm>
+            <a:off x="452847" y="2342604"/>
+            <a:ext cx="3782104" cy="2665356"/>
+          </a:xfrm>
+          <a:prstGeom prst="rect">
+            <a:avLst/>
+          </a:prstGeom>
+        </p:spPr>
+      </p:pic>
+    </p:spTree>
+    <p:extLst>
+      <p:ext uri="{BB962C8B-B14F-4D97-AF65-F5344CB8AC3E}">
+        <p14:creationId xmlns:p14="http://schemas.microsoft.com/office/powerpoint/2010/main" val="479028565"/>
+      </p:ext>
+    </p:extLst>
+  </p:cSld>
+  <p:clrMapOvr>
+    <a:masterClrMapping/>
+  </p:clrMapOvr>
+  <mc:AlternateContent xmlns:mc="http://schemas.openxmlformats.org/markup-compatibility/2006">
+    <mc:Choice xmlns:p14="http://schemas.microsoft.com/office/powerpoint/2010/main" Requires="p14">
+      <p:transition spd="slow" p14:dur="2000" advTm="2324"/>
+    </mc:Choice>
+    <mc:Fallback>
+      <p:transition spd="slow" advTm="2324"/>
+    </mc:Fallback>
+  </mc:AlternateContent>
+</p:sld>
+</file>
+
+<file path=ppt/slides/slide9.xml><?xml version="1.0" encoding="utf-8"?>
+<p:sld xmlns:a="http://schemas.openxmlformats.org/drawingml/2006/main" xmlns:r="http://schemas.openxmlformats.org/officeDocument/2006/relationships" xmlns:p="http://schemas.openxmlformats.org/presentationml/2006/main" showMasterSp="0">
+  <p:cSld>
+    <p:spTree>
+      <p:nvGrpSpPr>
+        <p:cNvPr id="1" name="">
+          <a:extLst>
+            <a:ext uri="{FF2B5EF4-FFF2-40B4-BE49-F238E27FC236}">
+              <a16:creationId xmlns:a16="http://schemas.microsoft.com/office/drawing/2014/main" id="{522C7761-2B70-A6A4-7577-AFEDEFA962FE}"/>
+            </a:ext>
+          </a:extLst>
+        </p:cNvPr>
+        <p:cNvGrpSpPr/>
+        <p:nvPr/>
+      </p:nvGrpSpPr>
+      <p:grpSpPr>
+        <a:xfrm>
+          <a:off x="0" y="0"/>
+          <a:ext cx="0" cy="0"/>
+          <a:chOff x="0" y="0"/>
+          <a:chExt cx="0" cy="0"/>
+        </a:xfrm>
+      </p:grpSpPr>
+      <p:sp>
+        <p:nvSpPr>
+          <p:cNvPr id="6" name="テキスト ボックス 5">
+            <a:extLst>
+              <a:ext uri="{FF2B5EF4-FFF2-40B4-BE49-F238E27FC236}">
+                <a16:creationId xmlns:a16="http://schemas.microsoft.com/office/drawing/2014/main" id="{0A51BD5E-1FF7-5A01-8E49-12E759D8E7A5}"/>
+              </a:ext>
+            </a:extLst>
+          </p:cNvPr>
+          <p:cNvSpPr txBox="1"/>
+          <p:nvPr/>
+        </p:nvSpPr>
+        <p:spPr>
+          <a:xfrm>
+            <a:off x="1714423" y="317440"/>
+            <a:ext cx="5715153" cy="584775"/>
+          </a:xfrm>
+          <a:prstGeom prst="rect">
+            <a:avLst/>
+          </a:prstGeom>
+          <a:solidFill>
+            <a:srgbClr val="FFFFFF">
+              <a:alpha val="50000"/>
+            </a:srgbClr>
+          </a:solidFill>
+        </p:spPr>
+        <p:txBody>
+          <a:bodyPr wrap="square" rtlCol="0">
+            <a:spAutoFit/>
+          </a:bodyPr>
+          <a:lstStyle/>
+          <a:p>
+            <a:pPr algn="ctr"/>
+            <a:r>
+              <a:rPr kumimoji="1" lang="ja-JP" altLang="en-US" sz="3200" dirty="0">
+                <a:solidFill>
+                  <a:srgbClr val="C00000"/>
+                </a:solidFill>
+                <a:latin typeface="源ノ角ゴシック JP Bold" panose="020B0800000000000000" pitchFamily="34" charset="-128"/>
+                <a:ea typeface="源ノ角ゴシック JP Bold" panose="020B0800000000000000" pitchFamily="34" charset="-128"/>
+              </a:rPr>
+              <a:t>ペットボトル缶サット</a:t>
+            </a:r>
+          </a:p>
+        </p:txBody>
+      </p:sp>
+      <p:sp>
+        <p:nvSpPr>
+          <p:cNvPr id="5" name="テキスト ボックス 4">
+            <a:extLst>
+              <a:ext uri="{FF2B5EF4-FFF2-40B4-BE49-F238E27FC236}">
+                <a16:creationId xmlns:a16="http://schemas.microsoft.com/office/drawing/2014/main" id="{56FEAD4C-6D13-A8BC-FD19-9026D5DFCDA3}"/>
+              </a:ext>
+            </a:extLst>
+          </p:cNvPr>
+          <p:cNvSpPr txBox="1"/>
+          <p:nvPr/>
+        </p:nvSpPr>
+        <p:spPr>
+          <a:xfrm>
+            <a:off x="488083" y="1062812"/>
+            <a:ext cx="7584763" cy="1015663"/>
+          </a:xfrm>
+          <a:prstGeom prst="rect">
+            <a:avLst/>
+          </a:prstGeom>
+          <a:solidFill>
+            <a:srgbClr val="FFFFFF">
+              <a:alpha val="50000"/>
+            </a:srgbClr>
+          </a:solidFill>
+        </p:spPr>
+        <p:txBody>
+          <a:bodyPr wrap="square" rtlCol="0">
+            <a:spAutoFit/>
+          </a:bodyPr>
+          <a:lstStyle/>
+          <a:p>
+            <a:r>
+              <a:rPr kumimoji="1" lang="ja-JP" altLang="en-US" sz="2000" dirty="0">
+                <a:solidFill>
+                  <a:srgbClr val="C00000"/>
+                </a:solidFill>
+                <a:latin typeface="源ノ角ゴシック JP Bold" panose="020B0800000000000000" pitchFamily="34" charset="-128"/>
+                <a:ea typeface="源ノ角ゴシック JP Bold" panose="020B0800000000000000" pitchFamily="34" charset="-128"/>
+              </a:rPr>
+              <a:t>カメラも固定</a:t>
+            </a:r>
+            <a:endParaRPr kumimoji="1" lang="en-US" altLang="ja-JP" sz="2000" dirty="0">
+              <a:solidFill>
+                <a:srgbClr val="C00000"/>
+              </a:solidFill>
+              <a:latin typeface="源ノ角ゴシック JP Bold" panose="020B0800000000000000" pitchFamily="34" charset="-128"/>
+              <a:ea typeface="源ノ角ゴシック JP Bold" panose="020B0800000000000000" pitchFamily="34" charset="-128"/>
+            </a:endParaRPr>
+          </a:p>
+          <a:p>
+            <a:r>
+              <a:rPr kumimoji="1" lang="ja-JP" altLang="en-US" sz="2000" dirty="0">
+                <a:solidFill>
+                  <a:srgbClr val="C00000"/>
+                </a:solidFill>
+                <a:latin typeface="源ノ角ゴシック JP Bold" panose="020B0800000000000000" pitchFamily="34" charset="-128"/>
+                <a:ea typeface="源ノ角ゴシック JP Bold" panose="020B0800000000000000" pitchFamily="34" charset="-128"/>
+              </a:rPr>
+              <a:t>カメラは、この固定方法しかないのですが、穴位置が違うので、</a:t>
+            </a:r>
+          </a:p>
+          <a:p>
+            <a:r>
+              <a:rPr kumimoji="1" lang="ja-JP" altLang="en-US" sz="2000" dirty="0">
+                <a:solidFill>
+                  <a:srgbClr val="C00000"/>
+                </a:solidFill>
+                <a:latin typeface="源ノ角ゴシック JP Bold" panose="020B0800000000000000" pitchFamily="34" charset="-128"/>
+                <a:ea typeface="源ノ角ゴシック JP Bold" panose="020B0800000000000000" pitchFamily="34" charset="-128"/>
+              </a:rPr>
+              <a:t>穴を広げる必要があります。</a:t>
+            </a:r>
+          </a:p>
+        </p:txBody>
+      </p:sp>
+      <p:sp>
+        <p:nvSpPr>
+          <p:cNvPr id="2" name="スライド番号プレースホルダー 1">
+            <a:extLst>
+              <a:ext uri="{FF2B5EF4-FFF2-40B4-BE49-F238E27FC236}">
+                <a16:creationId xmlns:a16="http://schemas.microsoft.com/office/drawing/2014/main" id="{111153FF-D2DC-9295-292F-B9C8DCC37C86}"/>
+              </a:ext>
+            </a:extLst>
+          </p:cNvPr>
+          <p:cNvSpPr>
+            <a:spLocks noGrp="1"/>
+          </p:cNvSpPr>
+          <p:nvPr>
+            <p:ph type="sldNum" sz="quarter" idx="12"/>
+          </p:nvPr>
+        </p:nvSpPr>
+        <p:spPr/>
+        <p:txBody>
+          <a:bodyPr/>
+          <a:lstStyle/>
+          <a:p>
+            <a:fld id="{A100B93A-21FB-4666-B0C5-EFD3C8C641C6}" type="slidenum">
+              <a:rPr kumimoji="1" lang="ja-JP" altLang="en-US" smtClean="0"/>
+              <a:t>9</a:t>
+            </a:fld>
+            <a:endParaRPr kumimoji="1" lang="ja-JP" altLang="en-US"/>
+          </a:p>
+        </p:txBody>
+      </p:sp>
+      <p:pic>
+        <p:nvPicPr>
+          <p:cNvPr id="11" name="図 10">
+            <a:extLst>
+              <a:ext uri="{FF2B5EF4-FFF2-40B4-BE49-F238E27FC236}">
+                <a16:creationId xmlns:a16="http://schemas.microsoft.com/office/drawing/2014/main" id="{0BB9BA21-43E2-A310-E890-FAAE144A4047}"/>
+              </a:ext>
+            </a:extLst>
+          </p:cNvPr>
+          <p:cNvPicPr>
+            <a:picLocks noChangeAspect="1"/>
+          </p:cNvPicPr>
+          <p:nvPr/>
+        </p:nvPicPr>
+        <p:blipFill>
+          <a:blip r:embed="rId3" cstate="screen">
+            <a:extLst>
+              <a:ext uri="{28A0092B-C50C-407E-A947-70E740481C1C}">
+                <a14:useLocalDpi xmlns:a14="http://schemas.microsoft.com/office/drawing/2010/main"/>
+              </a:ext>
+            </a:extLst>
+          </a:blip>
+          <a:stretch>
+            <a:fillRect/>
+          </a:stretch>
+        </p:blipFill>
+        <p:spPr>
+          <a:xfrm>
+            <a:off x="305735" y="2423739"/>
+            <a:ext cx="4126112" cy="3426401"/>
+          </a:xfrm>
+          <a:prstGeom prst="rect">
+            <a:avLst/>
+          </a:prstGeom>
+        </p:spPr>
+      </p:pic>
+      <p:pic>
+        <p:nvPicPr>
+          <p:cNvPr id="13" name="図 12">
+            <a:extLst>
+              <a:ext uri="{FF2B5EF4-FFF2-40B4-BE49-F238E27FC236}">
+                <a16:creationId xmlns:a16="http://schemas.microsoft.com/office/drawing/2014/main" id="{4934E8DA-4FE8-5BF2-D821-2BC52EE56D3D}"/>
               </a:ext>
             </a:extLst>
           </p:cNvPr>
@@ -10616,328 +10639,18 @@
         </p:blipFill>
         <p:spPr>
           <a:xfrm>
-            <a:off x="4571999" y="1991887"/>
-            <a:ext cx="3907990" cy="4548674"/>
+            <a:off x="4828824" y="2423739"/>
+            <a:ext cx="3304029" cy="3426401"/>
           </a:xfrm>
           <a:prstGeom prst="rect">
             <a:avLst/>
           </a:prstGeom>
         </p:spPr>
       </p:pic>
-      <p:sp>
-        <p:nvSpPr>
-          <p:cNvPr id="2" name="スライド番号プレースホルダー 1">
-            <a:extLst>
-              <a:ext uri="{FF2B5EF4-FFF2-40B4-BE49-F238E27FC236}">
-                <a16:creationId xmlns:a16="http://schemas.microsoft.com/office/drawing/2014/main" id="{B7C7A296-158B-01B2-37DC-75020FAA8924}"/>
-              </a:ext>
-            </a:extLst>
-          </p:cNvPr>
-          <p:cNvSpPr>
-            <a:spLocks noGrp="1"/>
-          </p:cNvSpPr>
-          <p:nvPr>
-            <p:ph type="sldNum" sz="quarter" idx="12"/>
-          </p:nvPr>
-        </p:nvSpPr>
-        <p:spPr/>
-        <p:txBody>
-          <a:bodyPr/>
-          <a:lstStyle/>
-          <a:p>
-            <a:fld id="{A100B93A-21FB-4666-B0C5-EFD3C8C641C6}" type="slidenum">
-              <a:rPr kumimoji="1" lang="ja-JP" altLang="en-US" smtClean="0"/>
-              <a:t>8</a:t>
-            </a:fld>
-            <a:endParaRPr kumimoji="1" lang="ja-JP" altLang="en-US"/>
-          </a:p>
-        </p:txBody>
-      </p:sp>
     </p:spTree>
     <p:extLst>
       <p:ext uri="{BB962C8B-B14F-4D97-AF65-F5344CB8AC3E}">
-        <p14:creationId xmlns:p14="http://schemas.microsoft.com/office/powerpoint/2010/main" val="282082073"/>
-      </p:ext>
-    </p:extLst>
-  </p:cSld>
-  <p:clrMapOvr>
-    <a:masterClrMapping/>
-  </p:clrMapOvr>
-  <mc:AlternateContent xmlns:mc="http://schemas.openxmlformats.org/markup-compatibility/2006" xmlns:p14="http://schemas.microsoft.com/office/powerpoint/2010/main">
-    <mc:Choice Requires="p14">
-      <p:transition spd="slow" p14:dur="2000" advTm="2324"/>
-    </mc:Choice>
-    <mc:Fallback xmlns="">
-      <p:transition spd="slow" advTm="2324"/>
-    </mc:Fallback>
-  </mc:AlternateContent>
-</p:sld>
-</file>
-
-<file path=ppt/slides/slide9.xml><?xml version="1.0" encoding="utf-8"?>
-<p:sld xmlns:a="http://schemas.openxmlformats.org/drawingml/2006/main" xmlns:r="http://schemas.openxmlformats.org/officeDocument/2006/relationships" xmlns:p="http://schemas.openxmlformats.org/presentationml/2006/main" showMasterSp="0">
-  <p:cSld>
-    <p:spTree>
-      <p:nvGrpSpPr>
-        <p:cNvPr id="1" name="">
-          <a:extLst>
-            <a:ext uri="{FF2B5EF4-FFF2-40B4-BE49-F238E27FC236}">
-              <a16:creationId xmlns:a16="http://schemas.microsoft.com/office/drawing/2014/main" id="{D6056313-9F98-DDA3-A7A7-9C232105CBDB}"/>
-            </a:ext>
-          </a:extLst>
-        </p:cNvPr>
-        <p:cNvGrpSpPr/>
-        <p:nvPr/>
-      </p:nvGrpSpPr>
-      <p:grpSpPr>
-        <a:xfrm>
-          <a:off x="0" y="0"/>
-          <a:ext cx="0" cy="0"/>
-          <a:chOff x="0" y="0"/>
-          <a:chExt cx="0" cy="0"/>
-        </a:xfrm>
-      </p:grpSpPr>
-      <p:sp>
-        <p:nvSpPr>
-          <p:cNvPr id="6" name="テキスト ボックス 5">
-            <a:extLst>
-              <a:ext uri="{FF2B5EF4-FFF2-40B4-BE49-F238E27FC236}">
-                <a16:creationId xmlns:a16="http://schemas.microsoft.com/office/drawing/2014/main" id="{46C7EC5F-61DC-B879-4758-5777E126902D}"/>
-              </a:ext>
-            </a:extLst>
-          </p:cNvPr>
-          <p:cNvSpPr txBox="1"/>
-          <p:nvPr/>
-        </p:nvSpPr>
-        <p:spPr>
-          <a:xfrm>
-            <a:off x="1714423" y="317440"/>
-            <a:ext cx="5715153" cy="584775"/>
-          </a:xfrm>
-          <a:prstGeom prst="rect">
-            <a:avLst/>
-          </a:prstGeom>
-          <a:solidFill>
-            <a:srgbClr val="FFFFFF">
-              <a:alpha val="50000"/>
-            </a:srgbClr>
-          </a:solidFill>
-        </p:spPr>
-        <p:txBody>
-          <a:bodyPr wrap="square" rtlCol="0">
-            <a:spAutoFit/>
-          </a:bodyPr>
-          <a:lstStyle/>
-          <a:p>
-            <a:pPr algn="ctr"/>
-            <a:r>
-              <a:rPr kumimoji="1" lang="ja-JP" altLang="en-US" sz="3200" dirty="0">
-                <a:solidFill>
-                  <a:srgbClr val="C00000"/>
-                </a:solidFill>
-                <a:latin typeface="源ノ角ゴシック JP Bold" panose="020B0800000000000000" pitchFamily="34" charset="-128"/>
-                <a:ea typeface="源ノ角ゴシック JP Bold" panose="020B0800000000000000" pitchFamily="34" charset="-128"/>
-              </a:rPr>
-              <a:t>ペットボトル缶サット</a:t>
-            </a:r>
-          </a:p>
-        </p:txBody>
-      </p:sp>
-      <p:sp>
-        <p:nvSpPr>
-          <p:cNvPr id="3" name="テキスト ボックス 2">
-            <a:extLst>
-              <a:ext uri="{FF2B5EF4-FFF2-40B4-BE49-F238E27FC236}">
-                <a16:creationId xmlns:a16="http://schemas.microsoft.com/office/drawing/2014/main" id="{37D834FB-0647-FA36-A945-4FB23E61ECAD}"/>
-              </a:ext>
-            </a:extLst>
-          </p:cNvPr>
-          <p:cNvSpPr txBox="1"/>
-          <p:nvPr/>
-        </p:nvSpPr>
-        <p:spPr>
-          <a:xfrm>
-            <a:off x="781250" y="1006732"/>
-            <a:ext cx="2875029" cy="400110"/>
-          </a:xfrm>
-          <a:prstGeom prst="rect">
-            <a:avLst/>
-          </a:prstGeom>
-          <a:solidFill>
-            <a:srgbClr val="FFFFFF">
-              <a:alpha val="50000"/>
-            </a:srgbClr>
-          </a:solidFill>
-        </p:spPr>
-        <p:txBody>
-          <a:bodyPr wrap="square" rtlCol="0">
-            <a:spAutoFit/>
-          </a:bodyPr>
-          <a:lstStyle/>
-          <a:p>
-            <a:r>
-              <a:rPr kumimoji="1" lang="ja-JP" altLang="en-US" sz="2000" dirty="0">
-                <a:solidFill>
-                  <a:srgbClr val="C00000"/>
-                </a:solidFill>
-                <a:latin typeface="源ノ角ゴシック JP Bold" panose="020B0800000000000000" pitchFamily="34" charset="-128"/>
-                <a:ea typeface="源ノ角ゴシック JP Bold" panose="020B0800000000000000" pitchFamily="34" charset="-128"/>
-              </a:rPr>
-              <a:t>電池も付けて動作確認</a:t>
-            </a:r>
-          </a:p>
-        </p:txBody>
-      </p:sp>
-      <p:sp>
-        <p:nvSpPr>
-          <p:cNvPr id="5" name="テキスト ボックス 4">
-            <a:extLst>
-              <a:ext uri="{FF2B5EF4-FFF2-40B4-BE49-F238E27FC236}">
-                <a16:creationId xmlns:a16="http://schemas.microsoft.com/office/drawing/2014/main" id="{4E384291-3612-0DDA-3EE1-DB653F3B6ACA}"/>
-              </a:ext>
-            </a:extLst>
-          </p:cNvPr>
-          <p:cNvSpPr txBox="1"/>
-          <p:nvPr/>
-        </p:nvSpPr>
-        <p:spPr>
-          <a:xfrm>
-            <a:off x="4639748" y="1007214"/>
-            <a:ext cx="2875030" cy="400110"/>
-          </a:xfrm>
-          <a:prstGeom prst="rect">
-            <a:avLst/>
-          </a:prstGeom>
-          <a:solidFill>
-            <a:srgbClr val="FFFFFF">
-              <a:alpha val="50000"/>
-            </a:srgbClr>
-          </a:solidFill>
-        </p:spPr>
-        <p:txBody>
-          <a:bodyPr wrap="square" rtlCol="0">
-            <a:spAutoFit/>
-          </a:bodyPr>
-          <a:lstStyle/>
-          <a:p>
-            <a:r>
-              <a:rPr kumimoji="1" lang="ja-JP" altLang="en-US" sz="2000" dirty="0">
-                <a:solidFill>
-                  <a:srgbClr val="C00000"/>
-                </a:solidFill>
-                <a:latin typeface="源ノ角ゴシック JP Bold" panose="020B0800000000000000" pitchFamily="34" charset="-128"/>
-                <a:ea typeface="源ノ角ゴシック JP Bold" panose="020B0800000000000000" pitchFamily="34" charset="-128"/>
-              </a:rPr>
-              <a:t>パラシュートも付けた</a:t>
-            </a:r>
-          </a:p>
-        </p:txBody>
-      </p:sp>
-      <p:pic>
-        <p:nvPicPr>
-          <p:cNvPr id="10" name="図 9">
-            <a:extLst>
-              <a:ext uri="{FF2B5EF4-FFF2-40B4-BE49-F238E27FC236}">
-                <a16:creationId xmlns:a16="http://schemas.microsoft.com/office/drawing/2014/main" id="{4C0F942B-D8E7-862B-C0F4-059902B5C694}"/>
-              </a:ext>
-            </a:extLst>
-          </p:cNvPr>
-          <p:cNvPicPr>
-            <a:picLocks noChangeAspect="1"/>
-          </p:cNvPicPr>
-          <p:nvPr/>
-        </p:nvPicPr>
-        <p:blipFill>
-          <a:blip r:embed="rId3" cstate="screen">
-            <a:extLst>
-              <a:ext uri="{28A0092B-C50C-407E-A947-70E740481C1C}">
-                <a14:useLocalDpi xmlns:a14="http://schemas.microsoft.com/office/drawing/2010/main"/>
-              </a:ext>
-            </a:extLst>
-          </a:blip>
-          <a:stretch>
-            <a:fillRect/>
-          </a:stretch>
-        </p:blipFill>
-        <p:spPr>
-          <a:xfrm>
-            <a:off x="903257" y="1402562"/>
-            <a:ext cx="2369845" cy="5359643"/>
-          </a:xfrm>
-          <a:prstGeom prst="rect">
-            <a:avLst/>
-          </a:prstGeom>
-        </p:spPr>
-      </p:pic>
-      <p:pic>
-        <p:nvPicPr>
-          <p:cNvPr id="12" name="図 11">
-            <a:extLst>
-              <a:ext uri="{FF2B5EF4-FFF2-40B4-BE49-F238E27FC236}">
-                <a16:creationId xmlns:a16="http://schemas.microsoft.com/office/drawing/2014/main" id="{EF494C1A-66EB-5F20-75C1-ED8668ABB437}"/>
-              </a:ext>
-            </a:extLst>
-          </p:cNvPr>
-          <p:cNvPicPr>
-            <a:picLocks noChangeAspect="1"/>
-          </p:cNvPicPr>
-          <p:nvPr/>
-        </p:nvPicPr>
-        <p:blipFill>
-          <a:blip r:embed="rId4" cstate="screen">
-            <a:extLst>
-              <a:ext uri="{28A0092B-C50C-407E-A947-70E740481C1C}">
-                <a14:useLocalDpi xmlns:a14="http://schemas.microsoft.com/office/drawing/2010/main"/>
-              </a:ext>
-            </a:extLst>
-          </a:blip>
-          <a:stretch>
-            <a:fillRect/>
-          </a:stretch>
-        </p:blipFill>
-        <p:spPr>
-          <a:xfrm>
-            <a:off x="3995313" y="1511359"/>
-            <a:ext cx="3912070" cy="5244915"/>
-          </a:xfrm>
-          <a:prstGeom prst="rect">
-            <a:avLst/>
-          </a:prstGeom>
-        </p:spPr>
-      </p:pic>
-      <p:sp>
-        <p:nvSpPr>
-          <p:cNvPr id="2" name="スライド番号プレースホルダー 1">
-            <a:extLst>
-              <a:ext uri="{FF2B5EF4-FFF2-40B4-BE49-F238E27FC236}">
-                <a16:creationId xmlns:a16="http://schemas.microsoft.com/office/drawing/2014/main" id="{EF090C2F-3AE9-6A7A-F395-4968CFDA073D}"/>
-              </a:ext>
-            </a:extLst>
-          </p:cNvPr>
-          <p:cNvSpPr>
-            <a:spLocks noGrp="1"/>
-          </p:cNvSpPr>
-          <p:nvPr>
-            <p:ph type="sldNum" sz="quarter" idx="12"/>
-          </p:nvPr>
-        </p:nvSpPr>
-        <p:spPr/>
-        <p:txBody>
-          <a:bodyPr/>
-          <a:lstStyle/>
-          <a:p>
-            <a:fld id="{A100B93A-21FB-4666-B0C5-EFD3C8C641C6}" type="slidenum">
-              <a:rPr kumimoji="1" lang="ja-JP" altLang="en-US" smtClean="0"/>
-              <a:t>9</a:t>
-            </a:fld>
-            <a:endParaRPr kumimoji="1" lang="ja-JP" altLang="en-US"/>
-          </a:p>
-        </p:txBody>
-      </p:sp>
-    </p:spTree>
-    <p:extLst>
-      <p:ext uri="{BB962C8B-B14F-4D97-AF65-F5344CB8AC3E}">
-        <p14:creationId xmlns:p14="http://schemas.microsoft.com/office/powerpoint/2010/main" val="3962895195"/>
+        <p14:creationId xmlns:p14="http://schemas.microsoft.com/office/powerpoint/2010/main" val="4059067911"/>
       </p:ext>
     </p:extLst>
   </p:cSld>
